--- a/Fase 3/Evidencias Grupales/Presentacion pre-final.pptx
+++ b/Fase 3/Evidencias Grupales/Presentacion pre-final.pptx
@@ -1159,7 +1159,21 @@
     </dgm:pt>
     <dgm:pt modelId="{3F97C059-D720-4D48-953F-B84D04D0BF79}" type="pres">
       <dgm:prSet presAssocID="{02A34BC0-F8BA-4A89-87A4-4F20079DFD06}" presName="img" presStyleLbl="fgImgPlace1" presStyleIdx="1" presStyleCnt="2"/>
-      <dgm:spPr/>
+      <dgm:spPr>
+        <a:blipFill>
+          <a:blip xmlns:r="http://schemas.openxmlformats.org/officeDocument/2006/relationships" r:embed="rId1">
+            <a:extLst>
+              <a:ext uri="{28A0092B-C50C-407E-A947-70E740481C1C}">
+                <a14:useLocalDpi xmlns:a14="http://schemas.microsoft.com/office/drawing/2010/main" val="0"/>
+              </a:ext>
+            </a:extLst>
+          </a:blip>
+          <a:srcRect/>
+          <a:stretch>
+            <a:fillRect t="-11000" b="-11000"/>
+          </a:stretch>
+        </a:blipFill>
+      </dgm:spPr>
     </dgm:pt>
     <dgm:pt modelId="{CFFDF23F-D296-4CDF-8EE4-8A672559E207}" type="pres">
       <dgm:prSet presAssocID="{02A34BC0-F8BA-4A89-87A4-4F20079DFD06}" presName="text" presStyleLbl="node1" presStyleIdx="1" presStyleCnt="2">
@@ -1581,15 +1595,19 @@
             <a:gd name="adj" fmla="val 10000"/>
           </a:avLst>
         </a:prstGeom>
-        <a:solidFill>
-          <a:schemeClr val="accent5">
-            <a:tint val="50000"/>
-            <a:hueOff val="0"/>
-            <a:satOff val="0"/>
-            <a:lumOff val="0"/>
-            <a:alphaOff val="0"/>
-          </a:schemeClr>
-        </a:solidFill>
+        <a:blipFill>
+          <a:blip xmlns:r="http://schemas.openxmlformats.org/officeDocument/2006/relationships" r:embed="rId1">
+            <a:extLst>
+              <a:ext uri="{28A0092B-C50C-407E-A947-70E740481C1C}">
+                <a14:useLocalDpi xmlns:a14="http://schemas.microsoft.com/office/drawing/2010/main" val="0"/>
+              </a:ext>
+            </a:extLst>
+          </a:blip>
+          <a:srcRect/>
+          <a:stretch>
+            <a:fillRect t="-11000" b="-11000"/>
+          </a:stretch>
+        </a:blipFill>
         <a:ln>
           <a:noFill/>
         </a:ln>
@@ -3008,7 +3026,7 @@
           <a:p>
             <a:fld id="{6E1704C8-43E3-4F4F-BE90-356A640D5754}" type="datetimeFigureOut">
               <a:rPr lang="es-CL" smtClean="0"/>
-              <a:t>20-11-2025</a:t>
+              <a:t>21-11-2025</a:t>
             </a:fld>
             <a:endParaRPr lang="es-CL"/>
           </a:p>
@@ -3211,7 +3229,7 @@
           <a:p>
             <a:fld id="{6E1704C8-43E3-4F4F-BE90-356A640D5754}" type="datetimeFigureOut">
               <a:rPr lang="es-CL" smtClean="0"/>
-              <a:t>20-11-2025</a:t>
+              <a:t>21-11-2025</a:t>
             </a:fld>
             <a:endParaRPr lang="es-CL"/>
           </a:p>
@@ -3424,7 +3442,7 @@
           <a:p>
             <a:fld id="{6E1704C8-43E3-4F4F-BE90-356A640D5754}" type="datetimeFigureOut">
               <a:rPr lang="es-CL" smtClean="0"/>
-              <a:t>20-11-2025</a:t>
+              <a:t>21-11-2025</a:t>
             </a:fld>
             <a:endParaRPr lang="es-CL"/>
           </a:p>
@@ -3627,7 +3645,7 @@
           <a:p>
             <a:fld id="{6E1704C8-43E3-4F4F-BE90-356A640D5754}" type="datetimeFigureOut">
               <a:rPr lang="es-CL" smtClean="0"/>
-              <a:t>20-11-2025</a:t>
+              <a:t>21-11-2025</a:t>
             </a:fld>
             <a:endParaRPr lang="es-CL"/>
           </a:p>
@@ -3906,7 +3924,7 @@
           <a:p>
             <a:fld id="{6E1704C8-43E3-4F4F-BE90-356A640D5754}" type="datetimeFigureOut">
               <a:rPr lang="es-CL" smtClean="0"/>
-              <a:t>20-11-2025</a:t>
+              <a:t>21-11-2025</a:t>
             </a:fld>
             <a:endParaRPr lang="es-CL"/>
           </a:p>
@@ -4177,7 +4195,7 @@
           <a:p>
             <a:fld id="{6E1704C8-43E3-4F4F-BE90-356A640D5754}" type="datetimeFigureOut">
               <a:rPr lang="es-CL" smtClean="0"/>
-              <a:t>20-11-2025</a:t>
+              <a:t>21-11-2025</a:t>
             </a:fld>
             <a:endParaRPr lang="es-CL"/>
           </a:p>
@@ -4595,7 +4613,7 @@
           <a:p>
             <a:fld id="{6E1704C8-43E3-4F4F-BE90-356A640D5754}" type="datetimeFigureOut">
               <a:rPr lang="es-CL" smtClean="0"/>
-              <a:t>20-11-2025</a:t>
+              <a:t>21-11-2025</a:t>
             </a:fld>
             <a:endParaRPr lang="es-CL"/>
           </a:p>
@@ -4740,7 +4758,7 @@
           <a:p>
             <a:fld id="{6E1704C8-43E3-4F4F-BE90-356A640D5754}" type="datetimeFigureOut">
               <a:rPr lang="es-CL" smtClean="0"/>
-              <a:t>20-11-2025</a:t>
+              <a:t>21-11-2025</a:t>
             </a:fld>
             <a:endParaRPr lang="es-CL"/>
           </a:p>
@@ -4856,7 +4874,7 @@
           <a:p>
             <a:fld id="{6E1704C8-43E3-4F4F-BE90-356A640D5754}" type="datetimeFigureOut">
               <a:rPr lang="es-CL" smtClean="0"/>
-              <a:t>20-11-2025</a:t>
+              <a:t>21-11-2025</a:t>
             </a:fld>
             <a:endParaRPr lang="es-CL"/>
           </a:p>
@@ -5172,7 +5190,7 @@
           <a:p>
             <a:fld id="{6E1704C8-43E3-4F4F-BE90-356A640D5754}" type="datetimeFigureOut">
               <a:rPr lang="es-CL" smtClean="0"/>
-              <a:t>20-11-2025</a:t>
+              <a:t>21-11-2025</a:t>
             </a:fld>
             <a:endParaRPr lang="es-CL"/>
           </a:p>
@@ -5464,7 +5482,7 @@
           <a:p>
             <a:fld id="{6E1704C8-43E3-4F4F-BE90-356A640D5754}" type="datetimeFigureOut">
               <a:rPr lang="es-CL" smtClean="0"/>
-              <a:t>20-11-2025</a:t>
+              <a:t>21-11-2025</a:t>
             </a:fld>
             <a:endParaRPr lang="es-CL"/>
           </a:p>
@@ -5710,7 +5728,7 @@
           <a:p>
             <a:fld id="{6E1704C8-43E3-4F4F-BE90-356A640D5754}" type="datetimeFigureOut">
               <a:rPr lang="es-CL" smtClean="0"/>
-              <a:t>20-11-2025</a:t>
+              <a:t>21-11-2025</a:t>
             </a:fld>
             <a:endParaRPr lang="es-CL"/>
           </a:p>
@@ -6191,7 +6209,7 @@
         </p:nvSpPr>
         <p:spPr>
           <a:xfrm>
-            <a:off x="1" y="2707792"/>
+            <a:off x="1" y="1996592"/>
             <a:ext cx="12191999" cy="1138773"/>
           </a:xfrm>
           <a:prstGeom prst="rect">
@@ -6229,6 +6247,42 @@
           </a:p>
         </p:txBody>
       </p:sp>
+      <p:pic>
+        <p:nvPicPr>
+          <p:cNvPr id="3" name="Imagen 2">
+            <a:extLst>
+              <a:ext uri="{FF2B5EF4-FFF2-40B4-BE49-F238E27FC236}">
+                <a16:creationId xmlns:a16="http://schemas.microsoft.com/office/drawing/2014/main" id="{3A320647-E61C-4062-BBE8-34550B133D05}"/>
+              </a:ext>
+            </a:extLst>
+          </p:cNvPr>
+          <p:cNvPicPr>
+            <a:picLocks noChangeAspect="1"/>
+          </p:cNvPicPr>
+          <p:nvPr/>
+        </p:nvPicPr>
+        <p:blipFill>
+          <a:blip r:embed="rId3">
+            <a:extLst>
+              <a:ext uri="{28A0092B-C50C-407E-A947-70E740481C1C}">
+                <a14:useLocalDpi xmlns:a14="http://schemas.microsoft.com/office/drawing/2010/main" val="0"/>
+              </a:ext>
+            </a:extLst>
+          </a:blip>
+          <a:stretch>
+            <a:fillRect/>
+          </a:stretch>
+        </p:blipFill>
+        <p:spPr>
+          <a:xfrm>
+            <a:off x="3678396" y="3722636"/>
+            <a:ext cx="4835207" cy="1655172"/>
+          </a:xfrm>
+          <a:prstGeom prst="rect">
+            <a:avLst/>
+          </a:prstGeom>
+        </p:spPr>
+      </p:pic>
     </p:spTree>
     <p:extLst>
       <p:ext uri="{BB962C8B-B14F-4D97-AF65-F5344CB8AC3E}">
@@ -7918,7 +7972,7 @@
           <p:nvPr>
             <p:extLst>
               <p:ext uri="{D42A27DB-BD31-4B8C-83A1-F6EECF244321}">
-                <p14:modId xmlns:p14="http://schemas.microsoft.com/office/powerpoint/2010/main" val="1767983663"/>
+                <p14:modId xmlns:p14="http://schemas.microsoft.com/office/powerpoint/2010/main" val="1258913220"/>
               </p:ext>
             </p:extLst>
           </p:nvPr>

--- a/Fase 3/Evidencias Grupales/Presentacion pre-final.pptx
+++ b/Fase 3/Evidencias Grupales/Presentacion pre-final.pptx
@@ -1135,7 +1135,15 @@
     </dgm:pt>
     <dgm:pt modelId="{9A7E2690-DE9C-4572-9BE5-B8C9A3B8BBB3}" type="pres">
       <dgm:prSet presAssocID="{78BFB295-8F5D-4286-B72B-79142F8F0E13}" presName="img" presStyleLbl="fgImgPlace1" presStyleIdx="0" presStyleCnt="2"/>
-      <dgm:spPr/>
+      <dgm:spPr>
+        <a:blipFill>
+          <a:blip xmlns:r="http://schemas.openxmlformats.org/officeDocument/2006/relationships" r:embed="rId1"/>
+          <a:srcRect/>
+          <a:stretch>
+            <a:fillRect l="-4000" r="-4000"/>
+          </a:stretch>
+        </a:blipFill>
+      </dgm:spPr>
     </dgm:pt>
     <dgm:pt modelId="{52D125D2-FCA7-4A2D-AB39-B6BD54F251F2}" type="pres">
       <dgm:prSet presAssocID="{78BFB295-8F5D-4286-B72B-79142F8F0E13}" presName="text" presStyleLbl="node1" presStyleIdx="0" presStyleCnt="2">
@@ -1161,7 +1169,7 @@
       <dgm:prSet presAssocID="{02A34BC0-F8BA-4A89-87A4-4F20079DFD06}" presName="img" presStyleLbl="fgImgPlace1" presStyleIdx="1" presStyleCnt="2"/>
       <dgm:spPr>
         <a:blipFill>
-          <a:blip xmlns:r="http://schemas.openxmlformats.org/officeDocument/2006/relationships" r:embed="rId1">
+          <a:blip xmlns:r="http://schemas.openxmlformats.org/officeDocument/2006/relationships" r:embed="rId2">
             <a:extLst>
               <a:ext uri="{28A0092B-C50C-407E-A947-70E740481C1C}">
                 <a14:useLocalDpi xmlns:a14="http://schemas.microsoft.com/office/drawing/2010/main" val="0"/>
@@ -1401,15 +1409,13 @@
             <a:gd name="adj" fmla="val 10000"/>
           </a:avLst>
         </a:prstGeom>
-        <a:solidFill>
-          <a:schemeClr val="accent5">
-            <a:tint val="50000"/>
-            <a:hueOff val="0"/>
-            <a:satOff val="0"/>
-            <a:lumOff val="0"/>
-            <a:alphaOff val="0"/>
-          </a:schemeClr>
-        </a:solidFill>
+        <a:blipFill>
+          <a:blip xmlns:r="http://schemas.openxmlformats.org/officeDocument/2006/relationships" r:embed="rId1"/>
+          <a:srcRect/>
+          <a:stretch>
+            <a:fillRect l="-4000" r="-4000"/>
+          </a:stretch>
+        </a:blipFill>
         <a:ln>
           <a:noFill/>
         </a:ln>
@@ -1596,7 +1602,7 @@
           </a:avLst>
         </a:prstGeom>
         <a:blipFill>
-          <a:blip xmlns:r="http://schemas.openxmlformats.org/officeDocument/2006/relationships" r:embed="rId1">
+          <a:blip xmlns:r="http://schemas.openxmlformats.org/officeDocument/2006/relationships" r:embed="rId2">
             <a:extLst>
               <a:ext uri="{28A0092B-C50C-407E-A947-70E740481C1C}">
                 <a14:useLocalDpi xmlns:a14="http://schemas.microsoft.com/office/drawing/2010/main" val="0"/>
@@ -7972,7 +7978,7 @@
           <p:nvPr>
             <p:extLst>
               <p:ext uri="{D42A27DB-BD31-4B8C-83A1-F6EECF244321}">
-                <p14:modId xmlns:p14="http://schemas.microsoft.com/office/powerpoint/2010/main" val="1258913220"/>
+                <p14:modId xmlns:p14="http://schemas.microsoft.com/office/powerpoint/2010/main" val="3977658374"/>
               </p:ext>
             </p:extLst>
           </p:nvPr>

--- a/Fase 3/Evidencias Grupales/Presentacion pre-final.pptx
+++ b/Fase 3/Evidencias Grupales/Presentacion pre-final.pptx
@@ -923,51 +923,6 @@
         </a:p>
       </dgm:t>
     </dgm:pt>
-    <dgm:pt modelId="{D868444B-AE34-4422-A6A5-1F7D392D0C20}">
-      <dgm:prSet phldrT="[Texto]"/>
-      <dgm:spPr/>
-      <dgm:t>
-        <a:bodyPr/>
-        <a:lstStyle/>
-        <a:p>
-          <a:r>
-            <a:rPr lang="es-MX" dirty="0" err="1"/>
-            <a:t>Product</a:t>
-          </a:r>
-          <a:r>
-            <a:rPr lang="es-MX" dirty="0"/>
-            <a:t> </a:t>
-          </a:r>
-          <a:r>
-            <a:rPr lang="es-MX" dirty="0" err="1"/>
-            <a:t>Owner</a:t>
-          </a:r>
-          <a:endParaRPr lang="es-CL" dirty="0"/>
-        </a:p>
-      </dgm:t>
-    </dgm:pt>
-    <dgm:pt modelId="{7DB88D83-6C3A-48C1-8CAD-0D11C3BEC35C}" type="parTrans" cxnId="{484B8A37-0122-4FF5-93D2-4A15DF521A17}">
-      <dgm:prSet/>
-      <dgm:spPr/>
-      <dgm:t>
-        <a:bodyPr/>
-        <a:lstStyle/>
-        <a:p>
-          <a:endParaRPr lang="es-CL"/>
-        </a:p>
-      </dgm:t>
-    </dgm:pt>
-    <dgm:pt modelId="{74B9B1A5-94EB-40A9-BFF2-678501068FB8}" type="sibTrans" cxnId="{484B8A37-0122-4FF5-93D2-4A15DF521A17}">
-      <dgm:prSet/>
-      <dgm:spPr/>
-      <dgm:t>
-        <a:bodyPr/>
-        <a:lstStyle/>
-        <a:p>
-          <a:endParaRPr lang="es-CL"/>
-        </a:p>
-      </dgm:t>
-    </dgm:pt>
     <dgm:pt modelId="{02A34BC0-F8BA-4A89-87A4-4F20079DFD06}">
       <dgm:prSet phldrT="[Texto]"/>
       <dgm:spPr/>
@@ -1042,43 +997,6 @@
         </a:p>
       </dgm:t>
     </dgm:pt>
-    <dgm:pt modelId="{EA3B2395-55AF-495E-9D6B-329D2886612F}">
-      <dgm:prSet phldrT="[Texto]"/>
-      <dgm:spPr/>
-      <dgm:t>
-        <a:bodyPr/>
-        <a:lstStyle/>
-        <a:p>
-          <a:r>
-            <a:rPr lang="es-MX" dirty="0"/>
-            <a:t>Scrum Master</a:t>
-          </a:r>
-          <a:endParaRPr lang="es-CL" dirty="0"/>
-        </a:p>
-      </dgm:t>
-    </dgm:pt>
-    <dgm:pt modelId="{11A4E056-7834-4F82-8A9C-B8EA31F159E3}" type="sibTrans" cxnId="{778F2DBC-81F3-476D-BD99-784E4F7153C8}">
-      <dgm:prSet/>
-      <dgm:spPr/>
-      <dgm:t>
-        <a:bodyPr/>
-        <a:lstStyle/>
-        <a:p>
-          <a:endParaRPr lang="es-CL"/>
-        </a:p>
-      </dgm:t>
-    </dgm:pt>
-    <dgm:pt modelId="{01DA10B6-3F7A-4C8A-AACD-F605EE6CCF20}" type="parTrans" cxnId="{778F2DBC-81F3-476D-BD99-784E4F7153C8}">
-      <dgm:prSet/>
-      <dgm:spPr/>
-      <dgm:t>
-        <a:bodyPr/>
-        <a:lstStyle/>
-        <a:p>
-          <a:endParaRPr lang="es-CL"/>
-        </a:p>
-      </dgm:t>
-    </dgm:pt>
     <dgm:pt modelId="{55A2A9EB-4C26-43C3-B721-D475B10BC39B}">
       <dgm:prSet phldrT="[Texto]"/>
       <dgm:spPr/>
@@ -1106,6 +1024,88 @@
       </dgm:t>
     </dgm:pt>
     <dgm:pt modelId="{B8424EB2-FFE7-4867-9D5A-EE0D46E8AAFE}" type="parTrans" cxnId="{ECED70CB-7A25-48F8-9E03-51596FB1E92C}">
+      <dgm:prSet/>
+      <dgm:spPr/>
+      <dgm:t>
+        <a:bodyPr/>
+        <a:lstStyle/>
+        <a:p>
+          <a:endParaRPr lang="es-CL"/>
+        </a:p>
+      </dgm:t>
+    </dgm:pt>
+    <dgm:pt modelId="{BE62047B-8C2B-4B07-9C6F-D39FB3FAC29C}">
+      <dgm:prSet phldrT="[Texto]"/>
+      <dgm:spPr/>
+      <dgm:t>
+        <a:bodyPr/>
+        <a:lstStyle/>
+        <a:p>
+          <a:r>
+            <a:rPr lang="es-MX" dirty="0"/>
+            <a:t>Scrum Master</a:t>
+          </a:r>
+          <a:endParaRPr lang="es-CL" dirty="0"/>
+        </a:p>
+      </dgm:t>
+    </dgm:pt>
+    <dgm:pt modelId="{AD528903-378A-492C-91D4-7FA93F9C83D7}" type="parTrans" cxnId="{E3681E0C-8DAD-41F4-B297-47A7529A858F}">
+      <dgm:prSet/>
+      <dgm:spPr/>
+      <dgm:t>
+        <a:bodyPr/>
+        <a:lstStyle/>
+        <a:p>
+          <a:endParaRPr lang="es-CL"/>
+        </a:p>
+      </dgm:t>
+    </dgm:pt>
+    <dgm:pt modelId="{F218BC97-7F81-48F8-9A51-8A98DA617295}" type="sibTrans" cxnId="{E3681E0C-8DAD-41F4-B297-47A7529A858F}">
+      <dgm:prSet/>
+      <dgm:spPr/>
+      <dgm:t>
+        <a:bodyPr/>
+        <a:lstStyle/>
+        <a:p>
+          <a:endParaRPr lang="es-CL"/>
+        </a:p>
+      </dgm:t>
+    </dgm:pt>
+    <dgm:pt modelId="{937F31D4-3340-4DC4-833F-4B23CBBA8E99}">
+      <dgm:prSet phldrT="[Texto]"/>
+      <dgm:spPr/>
+      <dgm:t>
+        <a:bodyPr/>
+        <a:lstStyle/>
+        <a:p>
+          <a:r>
+            <a:rPr lang="es-MX" dirty="0" err="1"/>
+            <a:t>Product</a:t>
+          </a:r>
+          <a:r>
+            <a:rPr lang="es-MX" dirty="0"/>
+            <a:t> </a:t>
+          </a:r>
+          <a:r>
+            <a:rPr lang="es-MX" dirty="0" err="1"/>
+            <a:t>Owner</a:t>
+          </a:r>
+          <a:endParaRPr lang="es-CL" dirty="0"/>
+        </a:p>
+      </dgm:t>
+    </dgm:pt>
+    <dgm:pt modelId="{35A931B3-2FA2-41DF-8160-F9594CF3071E}" type="parTrans" cxnId="{6768F608-CC42-4EFF-8E69-DC4D6D4254B7}">
+      <dgm:prSet/>
+      <dgm:spPr/>
+      <dgm:t>
+        <a:bodyPr/>
+        <a:lstStyle/>
+        <a:p>
+          <a:endParaRPr lang="es-CL"/>
+        </a:p>
+      </dgm:t>
+    </dgm:pt>
+    <dgm:pt modelId="{14189FC2-E02F-46CF-8358-D2A1707B877B}" type="sibTrans" cxnId="{6768F608-CC42-4EFF-8E69-DC4D6D4254B7}">
       <dgm:prSet/>
       <dgm:spPr/>
       <dgm:t>
@@ -1193,25 +1193,25 @@
     </dgm:pt>
   </dgm:ptLst>
   <dgm:cxnLst>
-    <dgm:cxn modelId="{399BD705-2380-48A3-9C48-1D49A5A32D61}" type="presOf" srcId="{2E221207-005F-49CB-81E1-6D036D64322B}" destId="{52D125D2-FCA7-4A2D-AB39-B6BD54F251F2}" srcOrd="1" destOrd="2" presId="urn:microsoft.com/office/officeart/2005/8/layout/vList4"/>
+    <dgm:cxn modelId="{399BD705-2380-48A3-9C48-1D49A5A32D61}" type="presOf" srcId="{2E221207-005F-49CB-81E1-6D036D64322B}" destId="{52D125D2-FCA7-4A2D-AB39-B6BD54F251F2}" srcOrd="1" destOrd="1" presId="urn:microsoft.com/office/officeart/2005/8/layout/vList4"/>
+    <dgm:cxn modelId="{6768F608-CC42-4EFF-8E69-DC4D6D4254B7}" srcId="{02A34BC0-F8BA-4A89-87A4-4F20079DFD06}" destId="{937F31D4-3340-4DC4-833F-4B23CBBA8E99}" srcOrd="1" destOrd="0" parTransId="{35A931B3-2FA2-41DF-8160-F9594CF3071E}" sibTransId="{14189FC2-E02F-46CF-8358-D2A1707B877B}"/>
+    <dgm:cxn modelId="{E3681E0C-8DAD-41F4-B297-47A7529A858F}" srcId="{78BFB295-8F5D-4286-B72B-79142F8F0E13}" destId="{BE62047B-8C2B-4B07-9C6F-D39FB3FAC29C}" srcOrd="1" destOrd="0" parTransId="{AD528903-378A-492C-91D4-7FA93F9C83D7}" sibTransId="{F218BC97-7F81-48F8-9A51-8A98DA617295}"/>
     <dgm:cxn modelId="{D2B94F0C-C779-4AC1-87E4-35116A3DED02}" type="presOf" srcId="{78BFB295-8F5D-4286-B72B-79142F8F0E13}" destId="{54FC4CB6-0791-48D3-B2C5-2E99B8AFCFF7}" srcOrd="0" destOrd="0" presId="urn:microsoft.com/office/officeart/2005/8/layout/vList4"/>
+    <dgm:cxn modelId="{58100F33-A881-4238-A7FC-28941A0AEA39}" type="presOf" srcId="{BE62047B-8C2B-4B07-9C6F-D39FB3FAC29C}" destId="{52D125D2-FCA7-4A2D-AB39-B6BD54F251F2}" srcOrd="1" destOrd="2" presId="urn:microsoft.com/office/officeart/2005/8/layout/vList4"/>
     <dgm:cxn modelId="{A6E20436-8EF1-4FFF-9C29-AC69BF1D5C4A}" type="presOf" srcId="{02A34BC0-F8BA-4A89-87A4-4F20079DFD06}" destId="{39AFE128-ACF6-44CA-B18B-64F5782CF210}" srcOrd="0" destOrd="0" presId="urn:microsoft.com/office/officeart/2005/8/layout/vList4"/>
-    <dgm:cxn modelId="{484B8A37-0122-4FF5-93D2-4A15DF521A17}" srcId="{78BFB295-8F5D-4286-B72B-79142F8F0E13}" destId="{D868444B-AE34-4422-A6A5-1F7D392D0C20}" srcOrd="0" destOrd="0" parTransId="{7DB88D83-6C3A-48C1-8CAD-0D11C3BEC35C}" sibTransId="{74B9B1A5-94EB-40A9-BFF2-678501068FB8}"/>
-    <dgm:cxn modelId="{22F3405C-AB8E-4AC3-A83C-C551BA0831ED}" type="presOf" srcId="{55A2A9EB-4C26-43C3-B721-D475B10BC39B}" destId="{39AFE128-ACF6-44CA-B18B-64F5782CF210}" srcOrd="0" destOrd="2" presId="urn:microsoft.com/office/officeart/2005/8/layout/vList4"/>
-    <dgm:cxn modelId="{7E8FC05E-FE02-4336-B1F8-3EAA05519A49}" type="presOf" srcId="{D868444B-AE34-4422-A6A5-1F7D392D0C20}" destId="{54FC4CB6-0791-48D3-B2C5-2E99B8AFCFF7}" srcOrd="0" destOrd="1" presId="urn:microsoft.com/office/officeart/2005/8/layout/vList4"/>
-    <dgm:cxn modelId="{DC02AD53-682D-464B-9D09-C1B6DCD5AFB0}" type="presOf" srcId="{55A2A9EB-4C26-43C3-B721-D475B10BC39B}" destId="{CFFDF23F-D296-4CDF-8EE4-8A672559E207}" srcOrd="1" destOrd="2" presId="urn:microsoft.com/office/officeart/2005/8/layout/vList4"/>
+    <dgm:cxn modelId="{22F3405C-AB8E-4AC3-A83C-C551BA0831ED}" type="presOf" srcId="{55A2A9EB-4C26-43C3-B721-D475B10BC39B}" destId="{39AFE128-ACF6-44CA-B18B-64F5782CF210}" srcOrd="0" destOrd="1" presId="urn:microsoft.com/office/officeart/2005/8/layout/vList4"/>
+    <dgm:cxn modelId="{4DBA2473-D3C7-4F89-905B-245F092BC096}" type="presOf" srcId="{937F31D4-3340-4DC4-833F-4B23CBBA8E99}" destId="{CFFDF23F-D296-4CDF-8EE4-8A672559E207}" srcOrd="1" destOrd="2" presId="urn:microsoft.com/office/officeart/2005/8/layout/vList4"/>
+    <dgm:cxn modelId="{DC02AD53-682D-464B-9D09-C1B6DCD5AFB0}" type="presOf" srcId="{55A2A9EB-4C26-43C3-B721-D475B10BC39B}" destId="{CFFDF23F-D296-4CDF-8EE4-8A672559E207}" srcOrd="1" destOrd="1" presId="urn:microsoft.com/office/officeart/2005/8/layout/vList4"/>
+    <dgm:cxn modelId="{E9C63D77-4F6A-4AA1-86C5-098C64C8EE0C}" type="presOf" srcId="{BE62047B-8C2B-4B07-9C6F-D39FB3FAC29C}" destId="{54FC4CB6-0791-48D3-B2C5-2E99B8AFCFF7}" srcOrd="0" destOrd="2" presId="urn:microsoft.com/office/officeart/2005/8/layout/vList4"/>
     <dgm:cxn modelId="{0E2AE979-A66C-4CEC-BFF4-5B28BB7CD9EA}" srcId="{BE45140C-C326-4DAA-A267-498AD5117D68}" destId="{02A34BC0-F8BA-4A89-87A4-4F20079DFD06}" srcOrd="1" destOrd="0" parTransId="{9ADB496F-2DB6-4F16-8C91-2EB9CDF5F2F2}" sibTransId="{44AB630E-CD8B-4223-9F51-5EEE4E054B0A}"/>
     <dgm:cxn modelId="{2AD07198-D472-4B98-B6D5-5A730374E9A2}" srcId="{BE45140C-C326-4DAA-A267-498AD5117D68}" destId="{78BFB295-8F5D-4286-B72B-79142F8F0E13}" srcOrd="0" destOrd="0" parTransId="{F1885FAB-61EC-4F80-98D0-72360031AF9F}" sibTransId="{E88D0928-51D4-4670-8963-60ABBB193E13}"/>
     <dgm:cxn modelId="{690A389C-25C1-485B-88F9-437236A47744}" type="presOf" srcId="{BE45140C-C326-4DAA-A267-498AD5117D68}" destId="{6E1E561E-88C1-49C6-A3F7-DE4B9AD43273}" srcOrd="0" destOrd="0" presId="urn:microsoft.com/office/officeart/2005/8/layout/vList4"/>
     <dgm:cxn modelId="{ECFD91A4-F44F-4C84-8B25-37DA0B249A1F}" type="presOf" srcId="{78BFB295-8F5D-4286-B72B-79142F8F0E13}" destId="{52D125D2-FCA7-4A2D-AB39-B6BD54F251F2}" srcOrd="1" destOrd="0" presId="urn:microsoft.com/office/officeart/2005/8/layout/vList4"/>
-    <dgm:cxn modelId="{778F2DBC-81F3-476D-BD99-784E4F7153C8}" srcId="{02A34BC0-F8BA-4A89-87A4-4F20079DFD06}" destId="{EA3B2395-55AF-495E-9D6B-329D2886612F}" srcOrd="0" destOrd="0" parTransId="{01DA10B6-3F7A-4C8A-AACD-F605EE6CCF20}" sibTransId="{11A4E056-7834-4F82-8A9C-B8EA31F159E3}"/>
-    <dgm:cxn modelId="{FE5360C5-555C-42B2-9E63-16D2D46F21B1}" type="presOf" srcId="{D868444B-AE34-4422-A6A5-1F7D392D0C20}" destId="{52D125D2-FCA7-4A2D-AB39-B6BD54F251F2}" srcOrd="1" destOrd="1" presId="urn:microsoft.com/office/officeart/2005/8/layout/vList4"/>
-    <dgm:cxn modelId="{1C3272C9-C630-4D60-B76B-138907BB4D41}" srcId="{78BFB295-8F5D-4286-B72B-79142F8F0E13}" destId="{2E221207-005F-49CB-81E1-6D036D64322B}" srcOrd="1" destOrd="0" parTransId="{B200B6AA-AA2A-4CB8-80FF-4BB54938E8A5}" sibTransId="{3728DB5E-E904-481D-A1E5-49CF4AFFC0D3}"/>
-    <dgm:cxn modelId="{B0C181C9-77EB-4775-B9E6-C6CBDA60E6EB}" type="presOf" srcId="{EA3B2395-55AF-495E-9D6B-329D2886612F}" destId="{CFFDF23F-D296-4CDF-8EE4-8A672559E207}" srcOrd="1" destOrd="1" presId="urn:microsoft.com/office/officeart/2005/8/layout/vList4"/>
-    <dgm:cxn modelId="{ECED70CB-7A25-48F8-9E03-51596FB1E92C}" srcId="{02A34BC0-F8BA-4A89-87A4-4F20079DFD06}" destId="{55A2A9EB-4C26-43C3-B721-D475B10BC39B}" srcOrd="1" destOrd="0" parTransId="{B8424EB2-FFE7-4867-9D5A-EE0D46E8AAFE}" sibTransId="{4EF4588A-187C-4393-9DFC-C6D80B20E995}"/>
+    <dgm:cxn modelId="{F7B000A6-8D1B-47AD-A7A9-06714CE1C8B0}" type="presOf" srcId="{937F31D4-3340-4DC4-833F-4B23CBBA8E99}" destId="{39AFE128-ACF6-44CA-B18B-64F5782CF210}" srcOrd="0" destOrd="2" presId="urn:microsoft.com/office/officeart/2005/8/layout/vList4"/>
+    <dgm:cxn modelId="{1C3272C9-C630-4D60-B76B-138907BB4D41}" srcId="{78BFB295-8F5D-4286-B72B-79142F8F0E13}" destId="{2E221207-005F-49CB-81E1-6D036D64322B}" srcOrd="0" destOrd="0" parTransId="{B200B6AA-AA2A-4CB8-80FF-4BB54938E8A5}" sibTransId="{3728DB5E-E904-481D-A1E5-49CF4AFFC0D3}"/>
+    <dgm:cxn modelId="{ECED70CB-7A25-48F8-9E03-51596FB1E92C}" srcId="{02A34BC0-F8BA-4A89-87A4-4F20079DFD06}" destId="{55A2A9EB-4C26-43C3-B721-D475B10BC39B}" srcOrd="0" destOrd="0" parTransId="{B8424EB2-FFE7-4867-9D5A-EE0D46E8AAFE}" sibTransId="{4EF4588A-187C-4393-9DFC-C6D80B20E995}"/>
     <dgm:cxn modelId="{22A4C7D2-C14A-4622-8C4E-3FE51F50DCC3}" type="presOf" srcId="{02A34BC0-F8BA-4A89-87A4-4F20079DFD06}" destId="{CFFDF23F-D296-4CDF-8EE4-8A672559E207}" srcOrd="1" destOrd="0" presId="urn:microsoft.com/office/officeart/2005/8/layout/vList4"/>
-    <dgm:cxn modelId="{A70C9FD5-2935-4C81-937A-B6C05F5E54BA}" type="presOf" srcId="{2E221207-005F-49CB-81E1-6D036D64322B}" destId="{54FC4CB6-0791-48D3-B2C5-2E99B8AFCFF7}" srcOrd="0" destOrd="2" presId="urn:microsoft.com/office/officeart/2005/8/layout/vList4"/>
-    <dgm:cxn modelId="{7ABE08FD-4ED4-44FB-BFBA-794B6C5FA813}" type="presOf" srcId="{EA3B2395-55AF-495E-9D6B-329D2886612F}" destId="{39AFE128-ACF6-44CA-B18B-64F5782CF210}" srcOrd="0" destOrd="1" presId="urn:microsoft.com/office/officeart/2005/8/layout/vList4"/>
+    <dgm:cxn modelId="{A70C9FD5-2935-4C81-937A-B6C05F5E54BA}" type="presOf" srcId="{2E221207-005F-49CB-81E1-6D036D64322B}" destId="{54FC4CB6-0791-48D3-B2C5-2E99B8AFCFF7}" srcOrd="0" destOrd="1" presId="urn:microsoft.com/office/officeart/2005/8/layout/vList4"/>
     <dgm:cxn modelId="{DA463EE6-78DB-4E59-8099-EBA029F401B0}" type="presParOf" srcId="{6E1E561E-88C1-49C6-A3F7-DE4B9AD43273}" destId="{F70979D0-5925-4EC3-AD84-986E0EC7B0D8}" srcOrd="0" destOrd="0" presId="urn:microsoft.com/office/officeart/2005/8/layout/vList4"/>
     <dgm:cxn modelId="{2FE346D7-6685-4BD0-9465-988681234E35}" type="presParOf" srcId="{F70979D0-5925-4EC3-AD84-986E0EC7B0D8}" destId="{54FC4CB6-0791-48D3-B2C5-2E99B8AFCFF7}" srcOrd="0" destOrd="0" presId="urn:microsoft.com/office/officeart/2005/8/layout/vList4"/>
     <dgm:cxn modelId="{3671DC51-8308-4E14-B210-C8528BB18500}" type="presParOf" srcId="{F70979D0-5925-4EC3-AD84-986E0EC7B0D8}" destId="{9A7E2690-DE9C-4572-9BE5-B8C9A3B8BBB3}" srcOrd="1" destOrd="0" presId="urn:microsoft.com/office/officeart/2005/8/layout/vList4"/>
@@ -1357,15 +1357,7 @@
           </a:pPr>
           <a:r>
             <a:rPr lang="es-MX" sz="3100" kern="1200" dirty="0" err="1"/>
-            <a:t>Product</a:t>
-          </a:r>
-          <a:r>
-            <a:rPr lang="es-MX" sz="3100" kern="1200" dirty="0"/>
-            <a:t> </a:t>
-          </a:r>
-          <a:r>
-            <a:rPr lang="es-MX" sz="3100" kern="1200" dirty="0" err="1"/>
-            <a:t>Owner</a:t>
+            <a:t>Developer</a:t>
           </a:r>
           <a:endParaRPr lang="es-CL" sz="3100" kern="1200" dirty="0"/>
         </a:p>
@@ -1383,8 +1375,8 @@
             <a:buChar char="•"/>
           </a:pPr>
           <a:r>
-            <a:rPr lang="es-MX" sz="3100" kern="1200" dirty="0" err="1"/>
-            <a:t>Developer</a:t>
+            <a:rPr lang="es-MX" sz="3100" kern="1200" dirty="0"/>
+            <a:t>Scrum Master</a:t>
           </a:r>
           <a:endParaRPr lang="es-CL" sz="3100" kern="1200" dirty="0"/>
         </a:p>
@@ -1556,8 +1548,8 @@
             <a:buChar char="•"/>
           </a:pPr>
           <a:r>
-            <a:rPr lang="es-MX" sz="3100" kern="1200" dirty="0"/>
-            <a:t>Scrum Master</a:t>
+            <a:rPr lang="es-MX" sz="3100" kern="1200" dirty="0" err="1"/>
+            <a:t>Developer</a:t>
           </a:r>
           <a:endParaRPr lang="es-CL" sz="3100" kern="1200" dirty="0"/>
         </a:p>
@@ -1576,7 +1568,15 @@
           </a:pPr>
           <a:r>
             <a:rPr lang="es-MX" sz="3100" kern="1200" dirty="0" err="1"/>
-            <a:t>Developer</a:t>
+            <a:t>Product</a:t>
+          </a:r>
+          <a:r>
+            <a:rPr lang="es-MX" sz="3100" kern="1200" dirty="0"/>
+            <a:t> </a:t>
+          </a:r>
+          <a:r>
+            <a:rPr lang="es-MX" sz="3100" kern="1200" dirty="0" err="1"/>
+            <a:t>Owner</a:t>
           </a:r>
           <a:endParaRPr lang="es-CL" sz="3100" kern="1200" dirty="0"/>
         </a:p>
@@ -7978,7 +7978,7 @@
           <p:nvPr>
             <p:extLst>
               <p:ext uri="{D42A27DB-BD31-4B8C-83A1-F6EECF244321}">
-                <p14:modId xmlns:p14="http://schemas.microsoft.com/office/powerpoint/2010/main" val="3977658374"/>
+                <p14:modId xmlns:p14="http://schemas.microsoft.com/office/powerpoint/2010/main" val="748182624"/>
               </p:ext>
             </p:extLst>
           </p:nvPr>
@@ -16961,8 +16961,8 @@
         </p:nvSpPr>
         <p:spPr bwMode="auto">
           <a:xfrm>
-            <a:off x="437542" y="1634150"/>
-            <a:ext cx="8743780" cy="4801314"/>
+            <a:off x="1435100" y="1410759"/>
+            <a:ext cx="9321799" cy="5078313"/>
           </a:xfrm>
           <a:prstGeom prst="rect">
             <a:avLst/>
@@ -17012,7 +17012,20 @@
           <a:p>
             <a:r>
               <a:rPr lang="es-CL" b="1" dirty="0"/>
-              <a:t>Frontend: </a:t>
+              <a:t>Modelo: MVC (Modelo-Vista-Controlador)</a:t>
+            </a:r>
+          </a:p>
+          <a:p>
+            <a:endParaRPr lang="es-CL" b="1" dirty="0"/>
+          </a:p>
+          <a:p>
+            <a:r>
+              <a:rPr lang="es-CL" b="1" dirty="0" err="1"/>
+              <a:t>Frontend</a:t>
+            </a:r>
+            <a:r>
+              <a:rPr lang="es-CL" b="1" dirty="0"/>
+              <a:t>: </a:t>
             </a:r>
             <a:r>
               <a:rPr lang="es-CL" dirty="0"/>

--- a/Fase 3/Evidencias Grupales/Presentacion pre-final.pptx
+++ b/Fase 3/Evidencias Grupales/Presentacion pre-final.pptx
@@ -14,11 +14,10 @@
     <p:sldId id="262" r:id="rId8"/>
     <p:sldId id="263" r:id="rId9"/>
     <p:sldId id="269" r:id="rId10"/>
-    <p:sldId id="270" r:id="rId11"/>
-    <p:sldId id="265" r:id="rId12"/>
-    <p:sldId id="267" r:id="rId13"/>
-    <p:sldId id="268" r:id="rId14"/>
-    <p:sldId id="266" r:id="rId15"/>
+    <p:sldId id="265" r:id="rId11"/>
+    <p:sldId id="267" r:id="rId12"/>
+    <p:sldId id="268" r:id="rId13"/>
+    <p:sldId id="266" r:id="rId14"/>
   </p:sldIdLst>
   <p:sldSz cx="12192000" cy="6858000"/>
   <p:notesSz cx="6858000" cy="9144000"/>
@@ -3032,7 +3031,7 @@
           <a:p>
             <a:fld id="{6E1704C8-43E3-4F4F-BE90-356A640D5754}" type="datetimeFigureOut">
               <a:rPr lang="es-CL" smtClean="0"/>
-              <a:t>21-11-2025</a:t>
+              <a:t>24-11-2025</a:t>
             </a:fld>
             <a:endParaRPr lang="es-CL"/>
           </a:p>
@@ -3235,7 +3234,7 @@
           <a:p>
             <a:fld id="{6E1704C8-43E3-4F4F-BE90-356A640D5754}" type="datetimeFigureOut">
               <a:rPr lang="es-CL" smtClean="0"/>
-              <a:t>21-11-2025</a:t>
+              <a:t>24-11-2025</a:t>
             </a:fld>
             <a:endParaRPr lang="es-CL"/>
           </a:p>
@@ -3448,7 +3447,7 @@
           <a:p>
             <a:fld id="{6E1704C8-43E3-4F4F-BE90-356A640D5754}" type="datetimeFigureOut">
               <a:rPr lang="es-CL" smtClean="0"/>
-              <a:t>21-11-2025</a:t>
+              <a:t>24-11-2025</a:t>
             </a:fld>
             <a:endParaRPr lang="es-CL"/>
           </a:p>
@@ -3651,7 +3650,7 @@
           <a:p>
             <a:fld id="{6E1704C8-43E3-4F4F-BE90-356A640D5754}" type="datetimeFigureOut">
               <a:rPr lang="es-CL" smtClean="0"/>
-              <a:t>21-11-2025</a:t>
+              <a:t>24-11-2025</a:t>
             </a:fld>
             <a:endParaRPr lang="es-CL"/>
           </a:p>
@@ -3930,7 +3929,7 @@
           <a:p>
             <a:fld id="{6E1704C8-43E3-4F4F-BE90-356A640D5754}" type="datetimeFigureOut">
               <a:rPr lang="es-CL" smtClean="0"/>
-              <a:t>21-11-2025</a:t>
+              <a:t>24-11-2025</a:t>
             </a:fld>
             <a:endParaRPr lang="es-CL"/>
           </a:p>
@@ -4201,7 +4200,7 @@
           <a:p>
             <a:fld id="{6E1704C8-43E3-4F4F-BE90-356A640D5754}" type="datetimeFigureOut">
               <a:rPr lang="es-CL" smtClean="0"/>
-              <a:t>21-11-2025</a:t>
+              <a:t>24-11-2025</a:t>
             </a:fld>
             <a:endParaRPr lang="es-CL"/>
           </a:p>
@@ -4619,7 +4618,7 @@
           <a:p>
             <a:fld id="{6E1704C8-43E3-4F4F-BE90-356A640D5754}" type="datetimeFigureOut">
               <a:rPr lang="es-CL" smtClean="0"/>
-              <a:t>21-11-2025</a:t>
+              <a:t>24-11-2025</a:t>
             </a:fld>
             <a:endParaRPr lang="es-CL"/>
           </a:p>
@@ -4764,7 +4763,7 @@
           <a:p>
             <a:fld id="{6E1704C8-43E3-4F4F-BE90-356A640D5754}" type="datetimeFigureOut">
               <a:rPr lang="es-CL" smtClean="0"/>
-              <a:t>21-11-2025</a:t>
+              <a:t>24-11-2025</a:t>
             </a:fld>
             <a:endParaRPr lang="es-CL"/>
           </a:p>
@@ -4880,7 +4879,7 @@
           <a:p>
             <a:fld id="{6E1704C8-43E3-4F4F-BE90-356A640D5754}" type="datetimeFigureOut">
               <a:rPr lang="es-CL" smtClean="0"/>
-              <a:t>21-11-2025</a:t>
+              <a:t>24-11-2025</a:t>
             </a:fld>
             <a:endParaRPr lang="es-CL"/>
           </a:p>
@@ -5196,7 +5195,7 @@
           <a:p>
             <a:fld id="{6E1704C8-43E3-4F4F-BE90-356A640D5754}" type="datetimeFigureOut">
               <a:rPr lang="es-CL" smtClean="0"/>
-              <a:t>21-11-2025</a:t>
+              <a:t>24-11-2025</a:t>
             </a:fld>
             <a:endParaRPr lang="es-CL"/>
           </a:p>
@@ -5488,7 +5487,7 @@
           <a:p>
             <a:fld id="{6E1704C8-43E3-4F4F-BE90-356A640D5754}" type="datetimeFigureOut">
               <a:rPr lang="es-CL" smtClean="0"/>
-              <a:t>21-11-2025</a:t>
+              <a:t>24-11-2025</a:t>
             </a:fld>
             <a:endParaRPr lang="es-CL"/>
           </a:p>
@@ -5734,7 +5733,7 @@
           <a:p>
             <a:fld id="{6E1704C8-43E3-4F4F-BE90-356A640D5754}" type="datetimeFigureOut">
               <a:rPr lang="es-CL" smtClean="0"/>
-              <a:t>21-11-2025</a:t>
+              <a:t>24-11-2025</a:t>
             </a:fld>
             <a:endParaRPr lang="es-CL"/>
           </a:p>
@@ -6371,10 +6370,10 @@
       </p:pic>
       <p:sp>
         <p:nvSpPr>
-          <p:cNvPr id="6" name="CuadroTexto 5">
+          <p:cNvPr id="4" name="CuadroTexto 3">
             <a:extLst>
               <a:ext uri="{FF2B5EF4-FFF2-40B4-BE49-F238E27FC236}">
-                <a16:creationId xmlns:a16="http://schemas.microsoft.com/office/drawing/2014/main" id="{54D38248-5D31-85F9-1E0F-4A607BCD5F6A}"/>
+                <a16:creationId xmlns:a16="http://schemas.microsoft.com/office/drawing/2014/main" id="{E3B5815F-4341-2A3D-A22D-8F6657D201F3}"/>
               </a:ext>
             </a:extLst>
           </p:cNvPr>
@@ -6383,8 +6382,8 @@
         </p:nvSpPr>
         <p:spPr>
           <a:xfrm>
-            <a:off x="136188" y="368928"/>
-            <a:ext cx="12191999" cy="369332"/>
+            <a:off x="1" y="2707792"/>
+            <a:ext cx="12191999" cy="1138773"/>
           </a:xfrm>
           <a:prstGeom prst="rect">
             <a:avLst/>
@@ -6397,488 +6396,20 @@
           </a:bodyPr>
           <a:lstStyle/>
           <a:p>
-            <a:r>
-              <a:rPr lang="es-MX" dirty="0">
-                <a:solidFill>
-                  <a:schemeClr val="bg2">
-                    <a:lumMod val="50000"/>
-                  </a:schemeClr>
-                </a:solidFill>
-              </a:rPr>
-              <a:t>PROYECTO “</a:t>
-            </a:r>
-            <a:r>
-              <a:rPr lang="pt-BR" dirty="0"/>
-              <a:t>Dulce Osadía</a:t>
-            </a:r>
-            <a:r>
-              <a:rPr lang="es-MX" dirty="0">
-                <a:solidFill>
-                  <a:schemeClr val="bg2">
-                    <a:lumMod val="50000"/>
-                  </a:schemeClr>
-                </a:solidFill>
-              </a:rPr>
-              <a:t>”</a:t>
-            </a:r>
-          </a:p>
-        </p:txBody>
-      </p:sp>
-      <p:sp>
-        <p:nvSpPr>
-          <p:cNvPr id="7" name="CuadroTexto 6">
-            <a:extLst>
-              <a:ext uri="{FF2B5EF4-FFF2-40B4-BE49-F238E27FC236}">
-                <a16:creationId xmlns:a16="http://schemas.microsoft.com/office/drawing/2014/main" id="{3A739E92-330D-944C-ED3E-C7F02FA216B3}"/>
-              </a:ext>
-            </a:extLst>
-          </p:cNvPr>
-          <p:cNvSpPr txBox="1"/>
-          <p:nvPr/>
-        </p:nvSpPr>
-        <p:spPr>
-          <a:xfrm>
-            <a:off x="0" y="1432655"/>
-            <a:ext cx="12191999" cy="646331"/>
-          </a:xfrm>
-          <a:prstGeom prst="rect">
-            <a:avLst/>
-          </a:prstGeom>
-          <a:noFill/>
-        </p:spPr>
-        <p:txBody>
-          <a:bodyPr wrap="square" rtlCol="0">
-            <a:spAutoFit/>
-          </a:bodyPr>
-          <a:lstStyle/>
-          <a:p>
             <a:pPr algn="ctr"/>
             <a:r>
-              <a:rPr lang="es-MX" sz="3600" dirty="0"/>
-              <a:t>Tecnologías utilizadas</a:t>
-            </a:r>
-          </a:p>
-        </p:txBody>
-      </p:sp>
-      <p:cxnSp>
-        <p:nvCxnSpPr>
-          <p:cNvPr id="9" name="Conector recto 8">
-            <a:extLst>
-              <a:ext uri="{FF2B5EF4-FFF2-40B4-BE49-F238E27FC236}">
-                <a16:creationId xmlns:a16="http://schemas.microsoft.com/office/drawing/2014/main" id="{8768D7F4-D478-E252-1441-D950598597DE}"/>
-              </a:ext>
-            </a:extLst>
-          </p:cNvPr>
-          <p:cNvCxnSpPr/>
-          <p:nvPr/>
-        </p:nvCxnSpPr>
-        <p:spPr>
-          <a:xfrm>
-            <a:off x="0" y="758027"/>
-            <a:ext cx="4085617" cy="0"/>
-          </a:xfrm>
-          <a:prstGeom prst="line">
-            <a:avLst/>
-          </a:prstGeom>
-          <a:ln w="15875">
-            <a:gradFill flip="none" rotWithShape="1">
-              <a:gsLst>
-                <a:gs pos="0">
-                  <a:schemeClr val="accent1">
-                    <a:lumMod val="5000"/>
-                    <a:lumOff val="95000"/>
-                  </a:schemeClr>
-                </a:gs>
-                <a:gs pos="74000">
-                  <a:schemeClr val="accent1">
-                    <a:lumMod val="45000"/>
-                    <a:lumOff val="55000"/>
-                  </a:schemeClr>
-                </a:gs>
-                <a:gs pos="83000">
-                  <a:schemeClr val="accent1">
-                    <a:lumMod val="45000"/>
-                    <a:lumOff val="55000"/>
-                  </a:schemeClr>
-                </a:gs>
-                <a:gs pos="100000">
-                  <a:schemeClr val="accent1">
-                    <a:lumMod val="30000"/>
-                    <a:lumOff val="70000"/>
-                  </a:schemeClr>
-                </a:gs>
-              </a:gsLst>
-              <a:lin ang="10800000" scaled="1"/>
-              <a:tileRect/>
-            </a:gradFill>
-          </a:ln>
-        </p:spPr>
-        <p:style>
-          <a:lnRef idx="1">
-            <a:schemeClr val="accent1"/>
-          </a:lnRef>
-          <a:fillRef idx="0">
-            <a:schemeClr val="accent1"/>
-          </a:fillRef>
-          <a:effectRef idx="0">
-            <a:schemeClr val="accent1"/>
-          </a:effectRef>
-          <a:fontRef idx="minor">
-            <a:schemeClr val="tx1"/>
-          </a:fontRef>
-        </p:style>
-      </p:cxnSp>
-      <p:sp>
-        <p:nvSpPr>
-          <p:cNvPr id="2" name="Rectangle 1">
-            <a:extLst>
-              <a:ext uri="{FF2B5EF4-FFF2-40B4-BE49-F238E27FC236}">
-                <a16:creationId xmlns:a16="http://schemas.microsoft.com/office/drawing/2014/main" id="{AACA3FF3-0DD4-FAFF-D094-CABF94486BE8}"/>
-              </a:ext>
-            </a:extLst>
-          </p:cNvPr>
-          <p:cNvSpPr>
-            <a:spLocks noChangeArrowheads="1"/>
-          </p:cNvSpPr>
-          <p:nvPr/>
-        </p:nvSpPr>
-        <p:spPr bwMode="auto">
-          <a:xfrm>
-            <a:off x="457200" y="2739908"/>
-            <a:ext cx="6307494" cy="2031325"/>
-          </a:xfrm>
-          <a:prstGeom prst="rect">
-            <a:avLst/>
-          </a:prstGeom>
-          <a:noFill/>
-          <a:ln>
-            <a:noFill/>
-          </a:ln>
-          <a:effectLst/>
-          <a:extLst>
-            <a:ext uri="{909E8E84-426E-40DD-AFC4-6F175D3DCCD1}">
-              <a14:hiddenFill xmlns:a14="http://schemas.microsoft.com/office/drawing/2010/main">
-                <a:solidFill>
-                  <a:schemeClr val="accent1"/>
-                </a:solidFill>
-              </a14:hiddenFill>
-            </a:ext>
-            <a:ext uri="{91240B29-F687-4F45-9708-019B960494DF}">
-              <a14:hiddenLine xmlns:a14="http://schemas.microsoft.com/office/drawing/2010/main" w="9525">
-                <a:solidFill>
-                  <a:schemeClr val="tx1"/>
-                </a:solidFill>
-                <a:miter lim="800000"/>
-                <a:headEnd/>
-                <a:tailEnd/>
-              </a14:hiddenLine>
-            </a:ext>
-            <a:ext uri="{AF507438-7753-43E0-B8FC-AC1667EBCBE1}">
-              <a14:hiddenEffects xmlns:a14="http://schemas.microsoft.com/office/drawing/2010/main">
-                <a:effectLst>
-                  <a:outerShdw dist="35921" dir="2700000" algn="ctr" rotWithShape="0">
-                    <a:schemeClr val="bg2"/>
-                  </a:outerShdw>
-                </a:effectLst>
-              </a14:hiddenEffects>
-            </a:ext>
-          </a:extLst>
-        </p:spPr>
-        <p:txBody>
-          <a:bodyPr vert="horz" wrap="square" lIns="91440" tIns="45720" rIns="91440" bIns="45720" numCol="1" anchor="ctr" anchorCtr="0" compatLnSpc="1">
-            <a:prstTxWarp prst="textNoShape">
-              <a:avLst/>
-            </a:prstTxWarp>
-            <a:spAutoFit/>
-          </a:bodyPr>
-          <a:lstStyle/>
-          <a:p>
-            <a:pPr marL="0" marR="0" lvl="0" indent="0" algn="l" defTabSz="914400" rtl="0" eaLnBrk="0" fontAlgn="base" latinLnBrk="0" hangingPunct="0">
-              <a:lnSpc>
-                <a:spcPct val="100000"/>
-              </a:lnSpc>
-              <a:spcBef>
-                <a:spcPct val="0"/>
-              </a:spcBef>
-              <a:spcAft>
-                <a:spcPct val="0"/>
-              </a:spcAft>
-              <a:buClrTx/>
-              <a:buSzTx/>
-              <a:buFontTx/>
-              <a:buChar char="•"/>
-              <a:tabLst/>
-            </a:pPr>
-            <a:r>
-              <a:rPr kumimoji="0" lang="es-CL" altLang="es-CL" sz="1800" b="1" i="0" u="none" strike="noStrike" cap="none" normalizeH="0" baseline="0">
-                <a:ln>
-                  <a:noFill/>
-                </a:ln>
-                <a:solidFill>
-                  <a:schemeClr val="tx1"/>
-                </a:solidFill>
-                <a:effectLst/>
-                <a:latin typeface="Arial" panose="020B0604020202020204" pitchFamily="34" charset="0"/>
-              </a:rPr>
-              <a:t>Lenguajes:</a:t>
-            </a:r>
-            <a:r>
-              <a:rPr kumimoji="0" lang="es-CL" altLang="es-CL" sz="1800" b="0" i="0" u="none" strike="noStrike" cap="none" normalizeH="0" baseline="0">
-                <a:ln>
-                  <a:noFill/>
-                </a:ln>
-                <a:solidFill>
-                  <a:schemeClr val="tx1"/>
-                </a:solidFill>
-                <a:effectLst/>
-                <a:latin typeface="Arial" panose="020B0604020202020204" pitchFamily="34" charset="0"/>
-              </a:rPr>
-              <a:t> PHP, HTML, CSS, JavaScript, SQL.</a:t>
-            </a:r>
-          </a:p>
-          <a:p>
-            <a:pPr marL="0" marR="0" lvl="0" indent="0" algn="l" defTabSz="914400" rtl="0" eaLnBrk="0" fontAlgn="base" latinLnBrk="0" hangingPunct="0">
-              <a:lnSpc>
-                <a:spcPct val="100000"/>
-              </a:lnSpc>
-              <a:spcBef>
-                <a:spcPct val="0"/>
-              </a:spcBef>
-              <a:spcAft>
-                <a:spcPct val="0"/>
-              </a:spcAft>
-              <a:buClrTx/>
-              <a:buSzTx/>
-              <a:buFontTx/>
-              <a:buChar char="•"/>
-              <a:tabLst/>
-            </a:pPr>
-            <a:r>
-              <a:rPr kumimoji="0" lang="es-CL" altLang="es-CL" sz="1800" b="1" i="0" u="none" strike="noStrike" cap="none" normalizeH="0" baseline="0">
-                <a:ln>
-                  <a:noFill/>
-                </a:ln>
-                <a:solidFill>
-                  <a:schemeClr val="tx1"/>
-                </a:solidFill>
-                <a:effectLst/>
-                <a:latin typeface="Arial" panose="020B0604020202020204" pitchFamily="34" charset="0"/>
-              </a:rPr>
-              <a:t>Gestión de Dependencias:</a:t>
-            </a:r>
-            <a:r>
-              <a:rPr kumimoji="0" lang="es-CL" altLang="es-CL" sz="1800" b="0" i="0" u="none" strike="noStrike" cap="none" normalizeH="0" baseline="0">
-                <a:ln>
-                  <a:noFill/>
-                </a:ln>
-                <a:solidFill>
-                  <a:schemeClr val="tx1"/>
-                </a:solidFill>
-                <a:effectLst/>
-                <a:latin typeface="Arial" panose="020B0604020202020204" pitchFamily="34" charset="0"/>
-              </a:rPr>
-              <a:t> Composer.</a:t>
-            </a:r>
-          </a:p>
-          <a:p>
-            <a:pPr marL="0" marR="0" lvl="0" indent="0" algn="l" defTabSz="914400" rtl="0" eaLnBrk="0" fontAlgn="base" latinLnBrk="0" hangingPunct="0">
-              <a:lnSpc>
-                <a:spcPct val="100000"/>
-              </a:lnSpc>
-              <a:spcBef>
-                <a:spcPct val="0"/>
-              </a:spcBef>
-              <a:spcAft>
-                <a:spcPct val="0"/>
-              </a:spcAft>
-              <a:buClrTx/>
-              <a:buSzTx/>
-              <a:buFontTx/>
-              <a:buChar char="•"/>
-              <a:tabLst/>
-            </a:pPr>
-            <a:r>
-              <a:rPr kumimoji="0" lang="es-CL" altLang="es-CL" sz="1800" b="1" i="0" u="none" strike="noStrike" cap="none" normalizeH="0" baseline="0">
-                <a:ln>
-                  <a:noFill/>
-                </a:ln>
-                <a:solidFill>
-                  <a:schemeClr val="tx1"/>
-                </a:solidFill>
-                <a:effectLst/>
-                <a:latin typeface="Arial" panose="020B0604020202020204" pitchFamily="34" charset="0"/>
-              </a:rPr>
-              <a:t>Librerías Clave:</a:t>
-            </a:r>
-            <a:endParaRPr kumimoji="0" lang="es-CL" altLang="es-CL" sz="1800" b="0" i="0" u="none" strike="noStrike" cap="none" normalizeH="0" baseline="0">
-              <a:ln>
-                <a:noFill/>
-              </a:ln>
+              <a:rPr lang="es-MX" sz="4400" dirty="0"/>
+              <a:t>DEMOSTRACIÓN DEL RESULTADO DEL PROYECTO</a:t>
+            </a:r>
+          </a:p>
+          <a:p>
+            <a:pPr algn="ctr"/>
+            <a:endParaRPr lang="es-CL" sz="2400" dirty="0">
               <a:solidFill>
-                <a:schemeClr val="tx1"/>
+                <a:schemeClr val="bg2">
+                  <a:lumMod val="50000"/>
+                </a:schemeClr>
               </a:solidFill>
-              <a:effectLst/>
-              <a:latin typeface="Arial" panose="020B0604020202020204" pitchFamily="34" charset="0"/>
-            </a:endParaRPr>
-          </a:p>
-          <a:p>
-            <a:pPr marL="0" marR="0" lvl="0" indent="0" algn="l" defTabSz="914400" rtl="0" eaLnBrk="0" fontAlgn="base" latinLnBrk="0" hangingPunct="0">
-              <a:lnSpc>
-                <a:spcPct val="100000"/>
-              </a:lnSpc>
-              <a:spcBef>
-                <a:spcPct val="0"/>
-              </a:spcBef>
-              <a:spcAft>
-                <a:spcPct val="0"/>
-              </a:spcAft>
-              <a:buClrTx/>
-              <a:buSzTx/>
-              <a:buFontTx/>
-              <a:buChar char="•"/>
-              <a:tabLst/>
-            </a:pPr>
-            <a:r>
-              <a:rPr kumimoji="0" lang="es-CL" altLang="es-CL" sz="1800" b="1" i="0" u="none" strike="noStrike" cap="none" normalizeH="0" baseline="0">
-                <a:ln>
-                  <a:noFill/>
-                </a:ln>
-                <a:solidFill>
-                  <a:schemeClr val="tx1"/>
-                </a:solidFill>
-                <a:effectLst/>
-                <a:latin typeface="Arial" panose="020B0604020202020204" pitchFamily="34" charset="0"/>
-              </a:rPr>
-              <a:t>Transbank SDK:</a:t>
-            </a:r>
-            <a:r>
-              <a:rPr kumimoji="0" lang="es-CL" altLang="es-CL" sz="1800" b="0" i="0" u="none" strike="noStrike" cap="none" normalizeH="0" baseline="0">
-                <a:ln>
-                  <a:noFill/>
-                </a:ln>
-                <a:solidFill>
-                  <a:schemeClr val="tx1"/>
-                </a:solidFill>
-                <a:effectLst/>
-                <a:latin typeface="Arial" panose="020B0604020202020204" pitchFamily="34" charset="0"/>
-              </a:rPr>
-              <a:t> Para pasarela de pagos segura.</a:t>
-            </a:r>
-          </a:p>
-          <a:p>
-            <a:pPr marL="0" marR="0" lvl="0" indent="0" algn="l" defTabSz="914400" rtl="0" eaLnBrk="0" fontAlgn="base" latinLnBrk="0" hangingPunct="0">
-              <a:lnSpc>
-                <a:spcPct val="100000"/>
-              </a:lnSpc>
-              <a:spcBef>
-                <a:spcPct val="0"/>
-              </a:spcBef>
-              <a:spcAft>
-                <a:spcPct val="0"/>
-              </a:spcAft>
-              <a:buClrTx/>
-              <a:buSzTx/>
-              <a:buFontTx/>
-              <a:buChar char="•"/>
-              <a:tabLst/>
-            </a:pPr>
-            <a:r>
-              <a:rPr kumimoji="0" lang="es-CL" altLang="es-CL" sz="1800" b="1" i="0" u="none" strike="noStrike" cap="none" normalizeH="0" baseline="0">
-                <a:ln>
-                  <a:noFill/>
-                </a:ln>
-                <a:solidFill>
-                  <a:schemeClr val="tx1"/>
-                </a:solidFill>
-                <a:effectLst/>
-                <a:latin typeface="Arial" panose="020B0604020202020204" pitchFamily="34" charset="0"/>
-              </a:rPr>
-              <a:t>PHPMailer:</a:t>
-            </a:r>
-            <a:r>
-              <a:rPr kumimoji="0" lang="es-CL" altLang="es-CL" sz="1800" b="0" i="0" u="none" strike="noStrike" cap="none" normalizeH="0" baseline="0">
-                <a:ln>
-                  <a:noFill/>
-                </a:ln>
-                <a:solidFill>
-                  <a:schemeClr val="tx1"/>
-                </a:solidFill>
-                <a:effectLst/>
-                <a:latin typeface="Arial" panose="020B0604020202020204" pitchFamily="34" charset="0"/>
-              </a:rPr>
-              <a:t> Para envío de correos electrónicos.</a:t>
-            </a:r>
-          </a:p>
-          <a:p>
-            <a:pPr marL="0" marR="0" lvl="0" indent="0" algn="l" defTabSz="914400" rtl="0" eaLnBrk="0" fontAlgn="base" latinLnBrk="0" hangingPunct="0">
-              <a:lnSpc>
-                <a:spcPct val="100000"/>
-              </a:lnSpc>
-              <a:spcBef>
-                <a:spcPct val="0"/>
-              </a:spcBef>
-              <a:spcAft>
-                <a:spcPct val="0"/>
-              </a:spcAft>
-              <a:buClrTx/>
-              <a:buSzTx/>
-              <a:buFontTx/>
-              <a:buChar char="•"/>
-              <a:tabLst/>
-            </a:pPr>
-            <a:r>
-              <a:rPr kumimoji="0" lang="es-CL" altLang="es-CL" sz="1800" b="1" i="0" u="none" strike="noStrike" cap="none" normalizeH="0" baseline="0">
-                <a:ln>
-                  <a:noFill/>
-                </a:ln>
-                <a:solidFill>
-                  <a:schemeClr val="tx1"/>
-                </a:solidFill>
-                <a:effectLst/>
-                <a:latin typeface="Arial" panose="020B0604020202020204" pitchFamily="34" charset="0"/>
-              </a:rPr>
-              <a:t>phpdotenv:</a:t>
-            </a:r>
-            <a:r>
-              <a:rPr kumimoji="0" lang="es-CL" altLang="es-CL" sz="1800" b="0" i="0" u="none" strike="noStrike" cap="none" normalizeH="0" baseline="0">
-                <a:ln>
-                  <a:noFill/>
-                </a:ln>
-                <a:solidFill>
-                  <a:schemeClr val="tx1"/>
-                </a:solidFill>
-                <a:effectLst/>
-                <a:latin typeface="Arial" panose="020B0604020202020204" pitchFamily="34" charset="0"/>
-              </a:rPr>
-              <a:t> Para gestión segura de variables de entorno</a:t>
-            </a:r>
-          </a:p>
-          <a:p>
-            <a:pPr marL="0" marR="0" lvl="0" indent="0" algn="l" defTabSz="914400" rtl="0" eaLnBrk="0" fontAlgn="base" latinLnBrk="0" hangingPunct="0">
-              <a:lnSpc>
-                <a:spcPct val="100000"/>
-              </a:lnSpc>
-              <a:spcBef>
-                <a:spcPct val="0"/>
-              </a:spcBef>
-              <a:spcAft>
-                <a:spcPct val="0"/>
-              </a:spcAft>
-              <a:buClrTx/>
-              <a:buSzTx/>
-              <a:buFontTx/>
-              <a:buNone/>
-              <a:tabLst/>
-            </a:pPr>
-            <a:endParaRPr kumimoji="0" lang="es-CL" altLang="es-CL" sz="1800" b="0" i="0" u="none" strike="noStrike" cap="none" normalizeH="0" baseline="0">
-              <a:ln>
-                <a:noFill/>
-              </a:ln>
-              <a:solidFill>
-                <a:schemeClr val="tx1"/>
-              </a:solidFill>
-              <a:effectLst/>
-              <a:latin typeface="Arial" panose="020B0604020202020204" pitchFamily="34" charset="0"/>
             </a:endParaRPr>
           </a:p>
         </p:txBody>
@@ -6886,7 +6417,7 @@
     </p:spTree>
     <p:extLst>
       <p:ext uri="{BB962C8B-B14F-4D97-AF65-F5344CB8AC3E}">
-        <p14:creationId xmlns:p14="http://schemas.microsoft.com/office/powerpoint/2010/main" val="3405368746"/>
+        <p14:creationId xmlns:p14="http://schemas.microsoft.com/office/powerpoint/2010/main" val="489174681"/>
       </p:ext>
     </p:extLst>
   </p:cSld>
@@ -6977,8 +6508,8 @@
         </p:nvSpPr>
         <p:spPr>
           <a:xfrm>
-            <a:off x="1" y="2707792"/>
-            <a:ext cx="12191999" cy="1138773"/>
+            <a:off x="1" y="1459095"/>
+            <a:ext cx="12191999" cy="769441"/>
           </a:xfrm>
           <a:prstGeom prst="rect">
             <a:avLst/>
@@ -6994,25 +6525,257 @@
             <a:pPr algn="ctr"/>
             <a:r>
               <a:rPr lang="es-MX" sz="4400" dirty="0"/>
-              <a:t>DEMOSTRACIÓN DEL RESULTADO DEL PROYECTO</a:t>
-            </a:r>
-          </a:p>
-          <a:p>
-            <a:pPr algn="ctr"/>
-            <a:endParaRPr lang="es-CL" sz="2400" dirty="0">
-              <a:solidFill>
-                <a:schemeClr val="bg2">
-                  <a:lumMod val="50000"/>
-                </a:schemeClr>
-              </a:solidFill>
-            </a:endParaRPr>
+              <a:t>Resultados obtenidos</a:t>
+            </a:r>
+          </a:p>
+        </p:txBody>
+      </p:sp>
+      <p:sp>
+        <p:nvSpPr>
+          <p:cNvPr id="2" name="Rectangle 1">
+            <a:extLst>
+              <a:ext uri="{FF2B5EF4-FFF2-40B4-BE49-F238E27FC236}">
+                <a16:creationId xmlns:a16="http://schemas.microsoft.com/office/drawing/2014/main" id="{9C60FD5C-8685-586F-14D7-8E39BEBEC376}"/>
+              </a:ext>
+            </a:extLst>
+          </p:cNvPr>
+          <p:cNvSpPr>
+            <a:spLocks noChangeArrowheads="1"/>
+          </p:cNvSpPr>
+          <p:nvPr/>
+        </p:nvSpPr>
+        <p:spPr bwMode="auto">
+          <a:xfrm>
+            <a:off x="475861" y="2833228"/>
+            <a:ext cx="9937102" cy="2031325"/>
+          </a:xfrm>
+          <a:prstGeom prst="rect">
+            <a:avLst/>
+          </a:prstGeom>
+          <a:noFill/>
+          <a:ln>
+            <a:noFill/>
+          </a:ln>
+          <a:effectLst/>
+          <a:extLst>
+            <a:ext uri="{909E8E84-426E-40DD-AFC4-6F175D3DCCD1}">
+              <a14:hiddenFill xmlns:a14="http://schemas.microsoft.com/office/drawing/2010/main">
+                <a:solidFill>
+                  <a:schemeClr val="accent1"/>
+                </a:solidFill>
+              </a14:hiddenFill>
+            </a:ext>
+            <a:ext uri="{91240B29-F687-4F45-9708-019B960494DF}">
+              <a14:hiddenLine xmlns:a14="http://schemas.microsoft.com/office/drawing/2010/main" w="9525">
+                <a:solidFill>
+                  <a:schemeClr val="tx1"/>
+                </a:solidFill>
+                <a:miter lim="800000"/>
+                <a:headEnd/>
+                <a:tailEnd/>
+              </a14:hiddenLine>
+            </a:ext>
+            <a:ext uri="{AF507438-7753-43E0-B8FC-AC1667EBCBE1}">
+              <a14:hiddenEffects xmlns:a14="http://schemas.microsoft.com/office/drawing/2010/main">
+                <a:effectLst>
+                  <a:outerShdw dist="35921" dir="2700000" algn="ctr" rotWithShape="0">
+                    <a:schemeClr val="bg2"/>
+                  </a:outerShdw>
+                </a:effectLst>
+              </a14:hiddenEffects>
+            </a:ext>
+          </a:extLst>
+        </p:spPr>
+        <p:txBody>
+          <a:bodyPr vert="horz" wrap="square" lIns="91440" tIns="45720" rIns="91440" bIns="45720" numCol="1" anchor="ctr" anchorCtr="0" compatLnSpc="1">
+            <a:prstTxWarp prst="textNoShape">
+              <a:avLst/>
+            </a:prstTxWarp>
+            <a:spAutoFit/>
+          </a:bodyPr>
+          <a:lstStyle/>
+          <a:p>
+            <a:pPr marL="0" marR="0" lvl="0" indent="0" algn="l" defTabSz="914400" rtl="0" eaLnBrk="0" fontAlgn="base" latinLnBrk="0" hangingPunct="0">
+              <a:lnSpc>
+                <a:spcPct val="100000"/>
+              </a:lnSpc>
+              <a:spcBef>
+                <a:spcPct val="0"/>
+              </a:spcBef>
+              <a:spcAft>
+                <a:spcPct val="0"/>
+              </a:spcAft>
+              <a:buClrTx/>
+              <a:buSzTx/>
+              <a:buFontTx/>
+              <a:buChar char="•"/>
+              <a:tabLst/>
+            </a:pPr>
+            <a:r>
+              <a:rPr kumimoji="0" lang="es-CL" altLang="es-CL" sz="1800" b="1" i="0" u="none" strike="noStrike" cap="none" normalizeH="0" baseline="0" dirty="0">
+                <a:ln>
+                  <a:noFill/>
+                </a:ln>
+                <a:solidFill>
+                  <a:schemeClr val="tx1"/>
+                </a:solidFill>
+                <a:effectLst/>
+                <a:latin typeface="Arial" panose="020B0604020202020204" pitchFamily="34" charset="0"/>
+              </a:rPr>
+              <a:t>Optimización Interna:</a:t>
+            </a:r>
+            <a:r>
+              <a:rPr kumimoji="0" lang="es-CL" altLang="es-CL" sz="1800" b="0" i="0" u="none" strike="noStrike" cap="none" normalizeH="0" baseline="0" dirty="0">
+                <a:ln>
+                  <a:noFill/>
+                </a:ln>
+                <a:solidFill>
+                  <a:schemeClr val="tx1"/>
+                </a:solidFill>
+                <a:effectLst/>
+                <a:latin typeface="Arial" panose="020B0604020202020204" pitchFamily="34" charset="0"/>
+              </a:rPr>
+              <a:t> Reducción de quiebres de stock y desperdicios gracias a la visibilidad de materias primas y gestión de recetas.</a:t>
+            </a:r>
+          </a:p>
+          <a:p>
+            <a:pPr marL="0" marR="0" lvl="0" indent="0" algn="l" defTabSz="914400" rtl="0" eaLnBrk="0" fontAlgn="base" latinLnBrk="0" hangingPunct="0">
+              <a:lnSpc>
+                <a:spcPct val="100000"/>
+              </a:lnSpc>
+              <a:spcBef>
+                <a:spcPct val="0"/>
+              </a:spcBef>
+              <a:spcAft>
+                <a:spcPct val="0"/>
+              </a:spcAft>
+              <a:buClrTx/>
+              <a:buSzTx/>
+              <a:buFontTx/>
+              <a:buChar char="•"/>
+              <a:tabLst/>
+            </a:pPr>
+            <a:r>
+              <a:rPr kumimoji="0" lang="es-CL" altLang="es-CL" sz="1800" b="1" i="0" u="none" strike="noStrike" cap="none" normalizeH="0" baseline="0" dirty="0">
+                <a:ln>
+                  <a:noFill/>
+                </a:ln>
+                <a:solidFill>
+                  <a:schemeClr val="tx1"/>
+                </a:solidFill>
+                <a:effectLst/>
+                <a:latin typeface="Arial" panose="020B0604020202020204" pitchFamily="34" charset="0"/>
+              </a:rPr>
+              <a:t>Expansión de Ventas:</a:t>
+            </a:r>
+            <a:r>
+              <a:rPr kumimoji="0" lang="es-CL" altLang="es-CL" sz="1800" b="0" i="0" u="none" strike="noStrike" cap="none" normalizeH="0" baseline="0" dirty="0">
+                <a:ln>
+                  <a:noFill/>
+                </a:ln>
+                <a:solidFill>
+                  <a:schemeClr val="tx1"/>
+                </a:solidFill>
+                <a:effectLst/>
+                <a:latin typeface="Arial" panose="020B0604020202020204" pitchFamily="34" charset="0"/>
+              </a:rPr>
+              <a:t> Apertura de un nuevo canal digital que rompe la barrera local mediante catálogo y carrito web.</a:t>
+            </a:r>
+          </a:p>
+          <a:p>
+            <a:pPr marL="0" marR="0" lvl="0" indent="0" algn="l" defTabSz="914400" rtl="0" eaLnBrk="0" fontAlgn="base" latinLnBrk="0" hangingPunct="0">
+              <a:lnSpc>
+                <a:spcPct val="100000"/>
+              </a:lnSpc>
+              <a:spcBef>
+                <a:spcPct val="0"/>
+              </a:spcBef>
+              <a:spcAft>
+                <a:spcPct val="0"/>
+              </a:spcAft>
+              <a:buClrTx/>
+              <a:buSzTx/>
+              <a:buFontTx/>
+              <a:buChar char="•"/>
+              <a:tabLst/>
+            </a:pPr>
+            <a:r>
+              <a:rPr kumimoji="0" lang="es-CL" altLang="es-CL" sz="1800" b="1" i="0" u="none" strike="noStrike" cap="none" normalizeH="0" baseline="0" dirty="0">
+                <a:ln>
+                  <a:noFill/>
+                </a:ln>
+                <a:solidFill>
+                  <a:schemeClr val="tx1"/>
+                </a:solidFill>
+                <a:effectLst/>
+                <a:latin typeface="Arial" panose="020B0604020202020204" pitchFamily="34" charset="0"/>
+              </a:rPr>
+              <a:t>Automatización:</a:t>
+            </a:r>
+            <a:r>
+              <a:rPr kumimoji="0" lang="es-CL" altLang="es-CL" sz="1800" b="0" i="0" u="none" strike="noStrike" cap="none" normalizeH="0" baseline="0" dirty="0">
+                <a:ln>
+                  <a:noFill/>
+                </a:ln>
+                <a:solidFill>
+                  <a:schemeClr val="tx1"/>
+                </a:solidFill>
+                <a:effectLst/>
+                <a:latin typeface="Arial" panose="020B0604020202020204" pitchFamily="34" charset="0"/>
+              </a:rPr>
+              <a:t> Disminución de la carga administrativa mediante pagos integrados y notificaciones automáticas.</a:t>
+            </a:r>
+          </a:p>
+          <a:p>
+            <a:pPr marL="0" marR="0" lvl="0" indent="0" algn="l" defTabSz="914400" rtl="0" eaLnBrk="0" fontAlgn="base" latinLnBrk="0" hangingPunct="0">
+              <a:lnSpc>
+                <a:spcPct val="100000"/>
+              </a:lnSpc>
+              <a:spcBef>
+                <a:spcPct val="0"/>
+              </a:spcBef>
+              <a:spcAft>
+                <a:spcPct val="0"/>
+              </a:spcAft>
+              <a:buClrTx/>
+              <a:buSzTx/>
+              <a:buFontTx/>
+              <a:buChar char="•"/>
+              <a:tabLst/>
+            </a:pPr>
+            <a:r>
+              <a:rPr kumimoji="0" lang="es-CL" altLang="es-CL" sz="1800" b="1" i="0" u="none" strike="noStrike" cap="none" normalizeH="0" baseline="0" dirty="0">
+                <a:ln>
+                  <a:noFill/>
+                </a:ln>
+                <a:solidFill>
+                  <a:schemeClr val="tx1"/>
+                </a:solidFill>
+                <a:effectLst/>
+                <a:latin typeface="Arial" panose="020B0604020202020204" pitchFamily="34" charset="0"/>
+              </a:rPr>
+              <a:t>Robustez Técnica:</a:t>
+            </a:r>
+            <a:r>
+              <a:rPr kumimoji="0" lang="es-CL" altLang="es-CL" sz="1800" b="0" i="0" u="none" strike="noStrike" cap="none" normalizeH="0" baseline="0" dirty="0">
+                <a:ln>
+                  <a:noFill/>
+                </a:ln>
+                <a:solidFill>
+                  <a:schemeClr val="tx1"/>
+                </a:solidFill>
+                <a:effectLst/>
+                <a:latin typeface="Arial" panose="020B0604020202020204" pitchFamily="34" charset="0"/>
+              </a:rPr>
+              <a:t> Sistema seguro y escalable basado en tecnologías estándar (PHP, SQL).</a:t>
+            </a:r>
           </a:p>
         </p:txBody>
       </p:sp>
     </p:spTree>
     <p:extLst>
       <p:ext uri="{BB962C8B-B14F-4D97-AF65-F5344CB8AC3E}">
-        <p14:creationId xmlns:p14="http://schemas.microsoft.com/office/powerpoint/2010/main" val="489174681"/>
+        <p14:creationId xmlns:p14="http://schemas.microsoft.com/office/powerpoint/2010/main" val="2904893737"/>
       </p:ext>
     </p:extLst>
   </p:cSld>
@@ -7103,364 +6866,6 @@
         </p:nvSpPr>
         <p:spPr>
           <a:xfrm>
-            <a:off x="1" y="1459095"/>
-            <a:ext cx="12191999" cy="769441"/>
-          </a:xfrm>
-          <a:prstGeom prst="rect">
-            <a:avLst/>
-          </a:prstGeom>
-          <a:noFill/>
-        </p:spPr>
-        <p:txBody>
-          <a:bodyPr wrap="square" rtlCol="0">
-            <a:spAutoFit/>
-          </a:bodyPr>
-          <a:lstStyle/>
-          <a:p>
-            <a:pPr algn="ctr"/>
-            <a:r>
-              <a:rPr lang="es-MX" sz="4400" dirty="0"/>
-              <a:t>Resultados obtenidos</a:t>
-            </a:r>
-          </a:p>
-        </p:txBody>
-      </p:sp>
-      <p:sp>
-        <p:nvSpPr>
-          <p:cNvPr id="2" name="Rectangle 1">
-            <a:extLst>
-              <a:ext uri="{FF2B5EF4-FFF2-40B4-BE49-F238E27FC236}">
-                <a16:creationId xmlns:a16="http://schemas.microsoft.com/office/drawing/2014/main" id="{9C60FD5C-8685-586F-14D7-8E39BEBEC376}"/>
-              </a:ext>
-            </a:extLst>
-          </p:cNvPr>
-          <p:cNvSpPr>
-            <a:spLocks noChangeArrowheads="1"/>
-          </p:cNvSpPr>
-          <p:nvPr/>
-        </p:nvSpPr>
-        <p:spPr bwMode="auto">
-          <a:xfrm>
-            <a:off x="475861" y="2833228"/>
-            <a:ext cx="9937102" cy="2031325"/>
-          </a:xfrm>
-          <a:prstGeom prst="rect">
-            <a:avLst/>
-          </a:prstGeom>
-          <a:noFill/>
-          <a:ln>
-            <a:noFill/>
-          </a:ln>
-          <a:effectLst/>
-          <a:extLst>
-            <a:ext uri="{909E8E84-426E-40DD-AFC4-6F175D3DCCD1}">
-              <a14:hiddenFill xmlns:a14="http://schemas.microsoft.com/office/drawing/2010/main">
-                <a:solidFill>
-                  <a:schemeClr val="accent1"/>
-                </a:solidFill>
-              </a14:hiddenFill>
-            </a:ext>
-            <a:ext uri="{91240B29-F687-4F45-9708-019B960494DF}">
-              <a14:hiddenLine xmlns:a14="http://schemas.microsoft.com/office/drawing/2010/main" w="9525">
-                <a:solidFill>
-                  <a:schemeClr val="tx1"/>
-                </a:solidFill>
-                <a:miter lim="800000"/>
-                <a:headEnd/>
-                <a:tailEnd/>
-              </a14:hiddenLine>
-            </a:ext>
-            <a:ext uri="{AF507438-7753-43E0-B8FC-AC1667EBCBE1}">
-              <a14:hiddenEffects xmlns:a14="http://schemas.microsoft.com/office/drawing/2010/main">
-                <a:effectLst>
-                  <a:outerShdw dist="35921" dir="2700000" algn="ctr" rotWithShape="0">
-                    <a:schemeClr val="bg2"/>
-                  </a:outerShdw>
-                </a:effectLst>
-              </a14:hiddenEffects>
-            </a:ext>
-          </a:extLst>
-        </p:spPr>
-        <p:txBody>
-          <a:bodyPr vert="horz" wrap="square" lIns="91440" tIns="45720" rIns="91440" bIns="45720" numCol="1" anchor="ctr" anchorCtr="0" compatLnSpc="1">
-            <a:prstTxWarp prst="textNoShape">
-              <a:avLst/>
-            </a:prstTxWarp>
-            <a:spAutoFit/>
-          </a:bodyPr>
-          <a:lstStyle/>
-          <a:p>
-            <a:pPr marL="0" marR="0" lvl="0" indent="0" algn="l" defTabSz="914400" rtl="0" eaLnBrk="0" fontAlgn="base" latinLnBrk="0" hangingPunct="0">
-              <a:lnSpc>
-                <a:spcPct val="100000"/>
-              </a:lnSpc>
-              <a:spcBef>
-                <a:spcPct val="0"/>
-              </a:spcBef>
-              <a:spcAft>
-                <a:spcPct val="0"/>
-              </a:spcAft>
-              <a:buClrTx/>
-              <a:buSzTx/>
-              <a:buFontTx/>
-              <a:buChar char="•"/>
-              <a:tabLst/>
-            </a:pPr>
-            <a:r>
-              <a:rPr kumimoji="0" lang="es-CL" altLang="es-CL" sz="1800" b="1" i="0" u="none" strike="noStrike" cap="none" normalizeH="0" baseline="0" dirty="0">
-                <a:ln>
-                  <a:noFill/>
-                </a:ln>
-                <a:solidFill>
-                  <a:schemeClr val="tx1"/>
-                </a:solidFill>
-                <a:effectLst/>
-                <a:latin typeface="Arial" panose="020B0604020202020204" pitchFamily="34" charset="0"/>
-              </a:rPr>
-              <a:t>Optimización Interna:</a:t>
-            </a:r>
-            <a:r>
-              <a:rPr kumimoji="0" lang="es-CL" altLang="es-CL" sz="1800" b="0" i="0" u="none" strike="noStrike" cap="none" normalizeH="0" baseline="0" dirty="0">
-                <a:ln>
-                  <a:noFill/>
-                </a:ln>
-                <a:solidFill>
-                  <a:schemeClr val="tx1"/>
-                </a:solidFill>
-                <a:effectLst/>
-                <a:latin typeface="Arial" panose="020B0604020202020204" pitchFamily="34" charset="0"/>
-              </a:rPr>
-              <a:t> Reducción de quiebres de stock y desperdicios gracias a la visibilidad de materias primas y gestión de recetas.</a:t>
-            </a:r>
-          </a:p>
-          <a:p>
-            <a:pPr marL="0" marR="0" lvl="0" indent="0" algn="l" defTabSz="914400" rtl="0" eaLnBrk="0" fontAlgn="base" latinLnBrk="0" hangingPunct="0">
-              <a:lnSpc>
-                <a:spcPct val="100000"/>
-              </a:lnSpc>
-              <a:spcBef>
-                <a:spcPct val="0"/>
-              </a:spcBef>
-              <a:spcAft>
-                <a:spcPct val="0"/>
-              </a:spcAft>
-              <a:buClrTx/>
-              <a:buSzTx/>
-              <a:buFontTx/>
-              <a:buChar char="•"/>
-              <a:tabLst/>
-            </a:pPr>
-            <a:r>
-              <a:rPr kumimoji="0" lang="es-CL" altLang="es-CL" sz="1800" b="1" i="0" u="none" strike="noStrike" cap="none" normalizeH="0" baseline="0" dirty="0">
-                <a:ln>
-                  <a:noFill/>
-                </a:ln>
-                <a:solidFill>
-                  <a:schemeClr val="tx1"/>
-                </a:solidFill>
-                <a:effectLst/>
-                <a:latin typeface="Arial" panose="020B0604020202020204" pitchFamily="34" charset="0"/>
-              </a:rPr>
-              <a:t>Expansión de Ventas:</a:t>
-            </a:r>
-            <a:r>
-              <a:rPr kumimoji="0" lang="es-CL" altLang="es-CL" sz="1800" b="0" i="0" u="none" strike="noStrike" cap="none" normalizeH="0" baseline="0" dirty="0">
-                <a:ln>
-                  <a:noFill/>
-                </a:ln>
-                <a:solidFill>
-                  <a:schemeClr val="tx1"/>
-                </a:solidFill>
-                <a:effectLst/>
-                <a:latin typeface="Arial" panose="020B0604020202020204" pitchFamily="34" charset="0"/>
-              </a:rPr>
-              <a:t> Apertura de un nuevo canal digital que rompe la barrera local mediante catálogo y carrito web.</a:t>
-            </a:r>
-          </a:p>
-          <a:p>
-            <a:pPr marL="0" marR="0" lvl="0" indent="0" algn="l" defTabSz="914400" rtl="0" eaLnBrk="0" fontAlgn="base" latinLnBrk="0" hangingPunct="0">
-              <a:lnSpc>
-                <a:spcPct val="100000"/>
-              </a:lnSpc>
-              <a:spcBef>
-                <a:spcPct val="0"/>
-              </a:spcBef>
-              <a:spcAft>
-                <a:spcPct val="0"/>
-              </a:spcAft>
-              <a:buClrTx/>
-              <a:buSzTx/>
-              <a:buFontTx/>
-              <a:buChar char="•"/>
-              <a:tabLst/>
-            </a:pPr>
-            <a:r>
-              <a:rPr kumimoji="0" lang="es-CL" altLang="es-CL" sz="1800" b="1" i="0" u="none" strike="noStrike" cap="none" normalizeH="0" baseline="0" dirty="0">
-                <a:ln>
-                  <a:noFill/>
-                </a:ln>
-                <a:solidFill>
-                  <a:schemeClr val="tx1"/>
-                </a:solidFill>
-                <a:effectLst/>
-                <a:latin typeface="Arial" panose="020B0604020202020204" pitchFamily="34" charset="0"/>
-              </a:rPr>
-              <a:t>Automatización:</a:t>
-            </a:r>
-            <a:r>
-              <a:rPr kumimoji="0" lang="es-CL" altLang="es-CL" sz="1800" b="0" i="0" u="none" strike="noStrike" cap="none" normalizeH="0" baseline="0" dirty="0">
-                <a:ln>
-                  <a:noFill/>
-                </a:ln>
-                <a:solidFill>
-                  <a:schemeClr val="tx1"/>
-                </a:solidFill>
-                <a:effectLst/>
-                <a:latin typeface="Arial" panose="020B0604020202020204" pitchFamily="34" charset="0"/>
-              </a:rPr>
-              <a:t> Disminución de la carga administrativa mediante pagos integrados y notificaciones automáticas.</a:t>
-            </a:r>
-          </a:p>
-          <a:p>
-            <a:pPr marL="0" marR="0" lvl="0" indent="0" algn="l" defTabSz="914400" rtl="0" eaLnBrk="0" fontAlgn="base" latinLnBrk="0" hangingPunct="0">
-              <a:lnSpc>
-                <a:spcPct val="100000"/>
-              </a:lnSpc>
-              <a:spcBef>
-                <a:spcPct val="0"/>
-              </a:spcBef>
-              <a:spcAft>
-                <a:spcPct val="0"/>
-              </a:spcAft>
-              <a:buClrTx/>
-              <a:buSzTx/>
-              <a:buFontTx/>
-              <a:buChar char="•"/>
-              <a:tabLst/>
-            </a:pPr>
-            <a:r>
-              <a:rPr kumimoji="0" lang="es-CL" altLang="es-CL" sz="1800" b="1" i="0" u="none" strike="noStrike" cap="none" normalizeH="0" baseline="0" dirty="0">
-                <a:ln>
-                  <a:noFill/>
-                </a:ln>
-                <a:solidFill>
-                  <a:schemeClr val="tx1"/>
-                </a:solidFill>
-                <a:effectLst/>
-                <a:latin typeface="Arial" panose="020B0604020202020204" pitchFamily="34" charset="0"/>
-              </a:rPr>
-              <a:t>Robustez Técnica:</a:t>
-            </a:r>
-            <a:r>
-              <a:rPr kumimoji="0" lang="es-CL" altLang="es-CL" sz="1800" b="0" i="0" u="none" strike="noStrike" cap="none" normalizeH="0" baseline="0" dirty="0">
-                <a:ln>
-                  <a:noFill/>
-                </a:ln>
-                <a:solidFill>
-                  <a:schemeClr val="tx1"/>
-                </a:solidFill>
-                <a:effectLst/>
-                <a:latin typeface="Arial" panose="020B0604020202020204" pitchFamily="34" charset="0"/>
-              </a:rPr>
-              <a:t> Sistema seguro y escalable basado en tecnologías estándar (PHP, SQL).</a:t>
-            </a:r>
-          </a:p>
-        </p:txBody>
-      </p:sp>
-    </p:spTree>
-    <p:extLst>
-      <p:ext uri="{BB962C8B-B14F-4D97-AF65-F5344CB8AC3E}">
-        <p14:creationId xmlns:p14="http://schemas.microsoft.com/office/powerpoint/2010/main" val="2904893737"/>
-      </p:ext>
-    </p:extLst>
-  </p:cSld>
-  <p:clrMapOvr>
-    <a:masterClrMapping/>
-  </p:clrMapOvr>
-  <p:transition spd="slow">
-    <p:wipe/>
-  </p:transition>
-</p:sld>
-</file>
-
-<file path=ppt/slides/slide13.xml><?xml version="1.0" encoding="utf-8"?>
-<p:sld xmlns:a="http://schemas.openxmlformats.org/drawingml/2006/main" xmlns:r="http://schemas.openxmlformats.org/officeDocument/2006/relationships" xmlns:p="http://schemas.openxmlformats.org/presentationml/2006/main">
-  <p:cSld>
-    <p:spTree>
-      <p:nvGrpSpPr>
-        <p:cNvPr id="1" name=""/>
-        <p:cNvGrpSpPr/>
-        <p:nvPr/>
-      </p:nvGrpSpPr>
-      <p:grpSpPr>
-        <a:xfrm>
-          <a:off x="0" y="0"/>
-          <a:ext cx="0" cy="0"/>
-          <a:chOff x="0" y="0"/>
-          <a:chExt cx="0" cy="0"/>
-        </a:xfrm>
-      </p:grpSpPr>
-      <p:pic>
-        <p:nvPicPr>
-          <p:cNvPr id="1026" name="Picture 2" descr="EscuelaIT Duoc UC - Escuela de Informática y Telecomunicaciones Duoc UC - Duoc  UC | LinkedIn">
-            <a:extLst>
-              <a:ext uri="{FF2B5EF4-FFF2-40B4-BE49-F238E27FC236}">
-                <a16:creationId xmlns:a16="http://schemas.microsoft.com/office/drawing/2014/main" id="{DBCE0F62-5978-5D25-A8E3-872B6D0A9912}"/>
-              </a:ext>
-            </a:extLst>
-          </p:cNvPr>
-          <p:cNvPicPr>
-            <a:picLocks noChangeAspect="1" noChangeArrowheads="1"/>
-          </p:cNvPicPr>
-          <p:nvPr/>
-        </p:nvPicPr>
-        <p:blipFill>
-          <a:blip r:embed="rId2">
-            <a:extLst>
-              <a:ext uri="{28A0092B-C50C-407E-A947-70E740481C1C}">
-                <a14:useLocalDpi xmlns:a14="http://schemas.microsoft.com/office/drawing/2010/main" val="0"/>
-              </a:ext>
-            </a:extLst>
-          </a:blip>
-          <a:srcRect/>
-          <a:stretch>
-            <a:fillRect/>
-          </a:stretch>
-        </p:blipFill>
-        <p:spPr bwMode="auto">
-          <a:xfrm>
-            <a:off x="8772152" y="207550"/>
-            <a:ext cx="3141406" cy="785352"/>
-          </a:xfrm>
-          <a:prstGeom prst="rect">
-            <a:avLst/>
-          </a:prstGeom>
-          <a:noFill/>
-          <a:extLst>
-            <a:ext uri="{909E8E84-426E-40DD-AFC4-6F175D3DCCD1}">
-              <a14:hiddenFill xmlns:a14="http://schemas.microsoft.com/office/drawing/2010/main">
-                <a:solidFill>
-                  <a:srgbClr val="FFFFFF"/>
-                </a:solidFill>
-              </a14:hiddenFill>
-            </a:ext>
-          </a:extLst>
-        </p:spPr>
-      </p:pic>
-      <p:sp>
-        <p:nvSpPr>
-          <p:cNvPr id="4" name="CuadroTexto 3">
-            <a:extLst>
-              <a:ext uri="{FF2B5EF4-FFF2-40B4-BE49-F238E27FC236}">
-                <a16:creationId xmlns:a16="http://schemas.microsoft.com/office/drawing/2014/main" id="{E3B5815F-4341-2A3D-A22D-8F6657D201F3}"/>
-              </a:ext>
-            </a:extLst>
-          </p:cNvPr>
-          <p:cNvSpPr txBox="1"/>
-          <p:nvPr/>
-        </p:nvSpPr>
-        <p:spPr>
-          <a:xfrm>
             <a:off x="1" y="1360773"/>
             <a:ext cx="12191999" cy="769441"/>
           </a:xfrm>
@@ -7785,7 +7190,7 @@
 </p:sld>
 </file>
 
-<file path=ppt/slides/slide14.xml><?xml version="1.0" encoding="utf-8"?>
+<file path=ppt/slides/slide13.xml><?xml version="1.0" encoding="utf-8"?>
 <p:sld xmlns:a="http://schemas.openxmlformats.org/drawingml/2006/main" xmlns:r="http://schemas.openxmlformats.org/officeDocument/2006/relationships" xmlns:p="http://schemas.openxmlformats.org/presentationml/2006/main">
   <p:cSld>
     <p:spTree>
@@ -9152,56 +8557,54 @@
           <a:lstStyle/>
           <a:p>
             <a:r>
-              <a:rPr lang="es-MX" dirty="0"/>
-              <a:t>Descripción: </a:t>
-            </a:r>
-            <a:r>
               <a:rPr lang="es-MX" b="1" dirty="0"/>
               <a:t>Desarrollar un módulo de inventario</a:t>
             </a:r>
             <a:r>
               <a:rPr lang="es-MX" dirty="0"/>
-              <a:t> que permita registrar insumos, controlar su disponibilidad y generar alertas de stock mínimo. </a:t>
-            </a:r>
+              <a:t>. </a:t>
+            </a:r>
+          </a:p>
+          <a:p>
             <a:r>
               <a:rPr lang="es-MX" b="1" dirty="0"/>
-              <a:t>Implementar un gestor de recetas</a:t>
-            </a:r>
-            <a:r>
-              <a:rPr lang="es-MX" dirty="0"/>
-              <a:t> que calcule automáticamente los insumos requeridos según el volumen de producción. </a:t>
-            </a:r>
+              <a:t>Implementar un gestor de recetas.</a:t>
+            </a:r>
+          </a:p>
+          <a:p>
             <a:r>
               <a:rPr lang="es-MX" b="1" dirty="0"/>
               <a:t>Construir un catálogo digital de productos</a:t>
             </a:r>
             <a:r>
               <a:rPr lang="es-MX" dirty="0"/>
-              <a:t> con descripciones, fotografías y precios. </a:t>
-            </a:r>
+              <a:t>.</a:t>
+            </a:r>
+          </a:p>
+          <a:p>
             <a:r>
               <a:rPr lang="es-MX" b="1" dirty="0"/>
               <a:t>Crear un carrito de compras funcional</a:t>
             </a:r>
             <a:r>
               <a:rPr lang="es-MX" dirty="0"/>
-              <a:t>, permitiendo agregar, modificar y eliminar productos. </a:t>
-            </a:r>
+              <a:t>. </a:t>
+            </a:r>
+          </a:p>
+          <a:p>
             <a:r>
               <a:rPr lang="es-MX" b="1" dirty="0"/>
-              <a:t>Implementar un flujo de pago integrado</a:t>
-            </a:r>
-            <a:r>
-              <a:rPr lang="es-MX" dirty="0"/>
-              <a:t> mediante Transbank SDK, asegurando transacciones seguras. </a:t>
-            </a:r>
+              <a:t>Implementar un flujo de pago integrado.</a:t>
+            </a:r>
+          </a:p>
+          <a:p>
             <a:r>
               <a:rPr lang="es-CL" b="1" dirty="0"/>
               <a:t>Desarrollar un módulo de pedidos</a:t>
             </a:r>
             <a:r>
               <a:rPr lang="es-CL" dirty="0"/>
-              <a:t>, permitiendo visualizar estados (pendiente, pagado, entregado).</a:t>
+              <a:t>.</a:t>
             </a:r>
           </a:p>
           <a:p>
@@ -9211,23 +8614,13 @@
             </a:r>
             <a:r>
               <a:rPr lang="es-MX" dirty="0"/>
-              <a:t> mediante </a:t>
-            </a:r>
-            <a:r>
-              <a:rPr lang="es-MX" dirty="0" err="1"/>
-              <a:t>PHPMailer</a:t>
-            </a:r>
-            <a:r>
-              <a:rPr lang="es-MX" dirty="0"/>
-              <a:t> (confirmación de compra, recuperación de contraseña). </a:t>
-            </a:r>
+              <a:t>. </a:t>
+            </a:r>
+          </a:p>
+          <a:p>
             <a:r>
               <a:rPr lang="es-MX" b="1" dirty="0"/>
-              <a:t>Construir una base de datos en MySQL</a:t>
-            </a:r>
-            <a:r>
-              <a:rPr lang="es-MX" dirty="0"/>
-              <a:t>, completamente normalizada y vinculada a la lógica del sistema.</a:t>
+              <a:t>Construir una base de datos en MySQL.</a:t>
             </a:r>
             <a:endParaRPr lang="es-CL" dirty="0"/>
           </a:p>
